--- a/thinqreal/fieldcheck/FieldCheck_진행보고_20260805.pptx
+++ b/thinqreal/fieldcheck/FieldCheck_진행보고_20260805.pptx
@@ -1314,7 +1314,7 @@
           <a:p>
             <a:r>
               <a:rPr lang="en-US" dirty="0"/>
-              <a:t>①②는 실패작이 아니라 실측으로 한계가 드러나 진화한 중간 단계입니다. 이 서사가 팀장 질문(시스템화)의 실질적 답입니다.</a:t>
+              <a:t>판정 기준은 |Δ|≥0.15 하나입니다. 채광은 느리고 가전은 빠르다는 시간 구조가 이 기준의 근거입니다.</a:t>
             </a:r>
             <a:endParaRPr lang="en-US" dirty="0"/>
           </a:p>
@@ -1402,7 +1402,7 @@
           <a:p>
             <a:r>
               <a:rPr lang="en-US" dirty="0"/>
-              <a:t>되물음 대응과 증거 보존이 L3의 두 설계 포인트입니다. 루틴 인식 취약성 발견은 점검이 잡아낸 실제 이슈로 별도 보고 가치가 있습니다.</a:t>
+              <a:t>되물음 대응과 증거 보존이 L3의 두 설계 포인트입니다.</a:t>
             </a:r>
             <a:endParaRPr lang="en-US" dirty="0"/>
           </a:p>
@@ -10988,7 +10988,7 @@
                 <a:ea typeface="맑은 고딕" pitchFamily="34" charset="-122"/>
                 <a:cs typeface="맑은 고딕" pitchFamily="34" charset="-120"/>
               </a:rPr>
-              <a:t>첫 실측에서 함정과 대응책이 동시에 실증됐습니다</a:t>
+              <a:t>현장 실측으로 판정 가능성이 확인됐습니다</a:t>
             </a:r>
             <a:endParaRPr lang="en-US" sz="1350" dirty="0"/>
           </a:p>
@@ -11030,7 +11030,7 @@
                 <a:ea typeface="맑은 고딕" pitchFamily="34" charset="-122"/>
                 <a:cs typeface="맑은 고딕" pitchFamily="34" charset="-120"/>
               </a:rPr>
-              <a:t>조명을 켜자 참조 벽의 절대 밝기가 49나 출렁였지만(방 전체</a:t>
+              <a:t>참조 벽의 절대 밝기가 49 출렁이는 동안(방 전체 반사 +</a:t>
             </a:r>
             <a:endParaRPr lang="en-US" sz="1200" dirty="0"/>
           </a:p>
@@ -11050,7 +11050,7 @@
                 <a:ea typeface="맑은 고딕" pitchFamily="34" charset="-122"/>
                 <a:cs typeface="맑은 고딕" pitchFamily="34" charset="-120"/>
               </a:rPr>
-              <a:t>반사 + 자동 노출), 상대값은 꺼짐 0.75 ↔ 켜짐 1.06으로</a:t>
+              <a:t>자동 노출) 상대값은 꺼짐 0.75 ↔ 켜짐 1.06으로 선명하게</a:t>
             </a:r>
             <a:endParaRPr lang="en-US" sz="1200" dirty="0"/>
           </a:p>
@@ -11070,7 +11070,7 @@
                 <a:ea typeface="맑은 고딕" pitchFamily="34" charset="-122"/>
                 <a:cs typeface="맑은 고딕" pitchFamily="34" charset="-120"/>
               </a:rPr>
-              <a:t>선명하게 갈라졌습니다 — 판정 가능성 확인.</a:t>
+              <a:t>갈라졌습니다 — 조명 상태가 수치로 구분됩니다.</a:t>
             </a:r>
             <a:endParaRPr lang="en-US" sz="1200" dirty="0"/>
           </a:p>
@@ -11141,7 +11141,7 @@
                 <a:ea typeface="맑은 고딕" pitchFamily="34" charset="-122"/>
                 <a:cs typeface="맑은 고딕" pitchFamily="34" charset="-120"/>
               </a:rPr>
-              <a:t>판정 알고리즘 — 절대값이 아니라 '명령 직후의 변화량'</a:t>
+              <a:t>판정 알고리즘 — '명령 직후의 변화량'</a:t>
             </a:r>
             <a:endParaRPr lang="en-US" sz="3200" dirty="0"/>
           </a:p>
@@ -11180,7 +11180,7 @@
                 <a:ea typeface="맑은 고딕" pitchFamily="34" charset="-122"/>
                 <a:cs typeface="맑은 고딕" pitchFamily="34" charset="-120"/>
               </a:rPr>
-              <a:t>현장 실측이 설계를 세 번 진화시켰습니다</a:t>
+              <a:t>얼마나 밝은가가 아니라, 명령 직후 얼마나 변했는가를 봅니다</a:t>
             </a:r>
             <a:endParaRPr lang="en-US" sz="1400" dirty="0"/>
           </a:p>
@@ -11195,345 +11195,11 @@
         <p:spPr>
           <a:xfrm>
             <a:off x="640080" y="1691640"/>
-            <a:ext cx="6675120" cy="1024128"/>
+            <a:ext cx="6675120" cy="1554480"/>
           </a:xfrm>
           <a:prstGeom prst="roundRect">
             <a:avLst>
-              <a:gd name="adj" fmla="val 8036"/>
-            </a:avLst>
-          </a:prstGeom>
-          <a:solidFill>
-            <a:srgbClr val="FFFFFF"/>
-          </a:solidFill>
-          <a:ln w="12700">
-            <a:solidFill>
-              <a:srgbClr val="E4E8E1"/>
-            </a:solidFill>
-            <a:prstDash val="solid"/>
-          </a:ln>
-        </p:spPr>
-      </p:sp>
-      <p:sp>
-        <p:nvSpPr>
-          <p:cNvPr id="5" name="Text 3"/>
-          <p:cNvSpPr/>
-          <p:nvPr/>
-        </p:nvSpPr>
-        <p:spPr>
-          <a:xfrm>
-            <a:off x="868680" y="1783080"/>
-            <a:ext cx="2377440" cy="329184"/>
-          </a:xfrm>
-          <a:prstGeom prst="rect">
-            <a:avLst/>
-          </a:prstGeom>
-          <a:noFill/>
-          <a:ln/>
-        </p:spPr>
-        <p:txBody>
-          <a:bodyPr wrap="square" lIns="0" tIns="0" rIns="0" bIns="0" rtlCol="0" anchor="ctr"/>
-          <a:lstStyle/>
-          <a:p>
-            <a:pPr indent="0" marL="0">
-              <a:buNone/>
-            </a:pPr>
-            <a:r>
-              <a:rPr lang="en-US" sz="1350" b="1" dirty="0">
-                <a:solidFill>
-                  <a:srgbClr val="1F2420"/>
-                </a:solidFill>
-                <a:latin typeface="맑은 고딕" pitchFamily="34" charset="0"/>
-                <a:ea typeface="맑은 고딕" pitchFamily="34" charset="-122"/>
-                <a:cs typeface="맑은 고딕" pitchFamily="34" charset="-120"/>
-              </a:rPr>
-              <a:t>①  절대 임계값</a:t>
-            </a:r>
-            <a:endParaRPr lang="en-US" sz="1350" dirty="0"/>
-          </a:p>
-        </p:txBody>
-      </p:sp>
-      <p:sp>
-        <p:nvSpPr>
-          <p:cNvPr id="6" name="Text 4"/>
-          <p:cNvSpPr/>
-          <p:nvPr/>
-        </p:nvSpPr>
-        <p:spPr>
-          <a:xfrm>
-            <a:off x="868680" y="2148840"/>
-            <a:ext cx="2651760" cy="457200"/>
-          </a:xfrm>
-          <a:prstGeom prst="rect">
-            <a:avLst/>
-          </a:prstGeom>
-          <a:noFill/>
-          <a:ln/>
-        </p:spPr>
-        <p:txBody>
-          <a:bodyPr wrap="square" lIns="0" tIns="0" rIns="0" bIns="0" rtlCol="0" anchor="ctr"/>
-          <a:lstStyle/>
-          <a:p>
-            <a:pPr indent="0" marL="0">
-              <a:buNone/>
-            </a:pPr>
-            <a:r>
-              <a:rPr lang="en-US" sz="1200" dirty="0">
-                <a:solidFill>
-                  <a:srgbClr val="6E786B"/>
-                </a:solidFill>
-                <a:latin typeface="맑은 고딕" pitchFamily="34" charset="0"/>
-                <a:ea typeface="맑은 고딕" pitchFamily="34" charset="-122"/>
-                <a:cs typeface="맑은 고딕" pitchFamily="34" charset="-120"/>
-              </a:rPr>
-              <a:t>상대값 0.905 이상 = 켜짐</a:t>
-            </a:r>
-            <a:endParaRPr lang="en-US" sz="1200" dirty="0"/>
-          </a:p>
-        </p:txBody>
-      </p:sp>
-      <p:sp>
-        <p:nvSpPr>
-          <p:cNvPr id="7" name="Text 5"/>
-          <p:cNvSpPr/>
-          <p:nvPr/>
-        </p:nvSpPr>
-        <p:spPr>
-          <a:xfrm>
-            <a:off x="3611880" y="1783080"/>
-            <a:ext cx="3520440" cy="868680"/>
-          </a:xfrm>
-          <a:prstGeom prst="rect">
-            <a:avLst/>
-          </a:prstGeom>
-          <a:noFill/>
-          <a:ln/>
-        </p:spPr>
-        <p:txBody>
-          <a:bodyPr wrap="square" lIns="0" tIns="0" rIns="0" bIns="0" rtlCol="0" anchor="ctr"/>
-          <a:lstStyle/>
-          <a:p>
-            <a:pPr indent="0" marL="0">
-              <a:lnSpc>
-                <a:spcPts val="1500"/>
-              </a:lnSpc>
-              <a:buNone/>
-            </a:pPr>
-            <a:r>
-              <a:rPr lang="en-US" sz="1050" dirty="0">
-                <a:solidFill>
-                  <a:srgbClr val="6E786B"/>
-                </a:solidFill>
-                <a:latin typeface="맑은 고딕" pitchFamily="34" charset="0"/>
-                <a:ea typeface="맑은 고딕" pitchFamily="34" charset="-122"/>
-                <a:cs typeface="맑은 고딕" pitchFamily="34" charset="-120"/>
-              </a:rPr>
-              <a:t>커튼·시각에 따라 기준선 자체가 이동</a:t>
-            </a:r>
-            <a:endParaRPr lang="en-US" sz="1050" dirty="0"/>
-          </a:p>
-          <a:p>
-            <a:pPr indent="0" marL="0">
-              <a:lnSpc>
-                <a:spcPts val="1500"/>
-              </a:lnSpc>
-              <a:buNone/>
-            </a:pPr>
-            <a:r>
-              <a:rPr lang="en-US" sz="1050" dirty="0">
-                <a:solidFill>
-                  <a:srgbClr val="6E786B"/>
-                </a:solidFill>
-                <a:latin typeface="맑은 고딕" pitchFamily="34" charset="0"/>
-                <a:ea typeface="맑은 고딕" pitchFamily="34" charset="-122"/>
-                <a:cs typeface="맑은 고딕" pitchFamily="34" charset="-120"/>
-              </a:rPr>
-              <a:t>(오전 꺼짐 0.746/켜짐 1.063 ↔ 낮 0.911/1.225)</a:t>
-            </a:r>
-            <a:endParaRPr lang="en-US" sz="1050" dirty="0"/>
-          </a:p>
-        </p:txBody>
-      </p:sp>
-      <p:sp>
-        <p:nvSpPr>
-          <p:cNvPr id="8" name="Shape 6"/>
-          <p:cNvSpPr/>
-          <p:nvPr/>
-        </p:nvSpPr>
-        <p:spPr>
-          <a:xfrm>
-            <a:off x="640080" y="2862072"/>
-            <a:ext cx="6675120" cy="1024128"/>
-          </a:xfrm>
-          <a:prstGeom prst="roundRect">
-            <a:avLst>
-              <a:gd name="adj" fmla="val 8036"/>
-            </a:avLst>
-          </a:prstGeom>
-          <a:solidFill>
-            <a:srgbClr val="FFFFFF"/>
-          </a:solidFill>
-          <a:ln w="12700">
-            <a:solidFill>
-              <a:srgbClr val="E4E8E1"/>
-            </a:solidFill>
-            <a:prstDash val="solid"/>
-          </a:ln>
-        </p:spPr>
-      </p:sp>
-      <p:sp>
-        <p:nvSpPr>
-          <p:cNvPr id="9" name="Text 7"/>
-          <p:cNvSpPr/>
-          <p:nvPr/>
-        </p:nvSpPr>
-        <p:spPr>
-          <a:xfrm>
-            <a:off x="868680" y="2953512"/>
-            <a:ext cx="2377440" cy="329184"/>
-          </a:xfrm>
-          <a:prstGeom prst="rect">
-            <a:avLst/>
-          </a:prstGeom>
-          <a:noFill/>
-          <a:ln/>
-        </p:spPr>
-        <p:txBody>
-          <a:bodyPr wrap="square" lIns="0" tIns="0" rIns="0" bIns="0" rtlCol="0" anchor="ctr"/>
-          <a:lstStyle/>
-          <a:p>
-            <a:pPr indent="0" marL="0">
-              <a:buNone/>
-            </a:pPr>
-            <a:r>
-              <a:rPr lang="en-US" sz="1350" b="1" dirty="0">
-                <a:solidFill>
-                  <a:srgbClr val="1F2420"/>
-                </a:solidFill>
-                <a:latin typeface="맑은 고딕" pitchFamily="34" charset="0"/>
-                <a:ea typeface="맑은 고딕" pitchFamily="34" charset="-122"/>
-                <a:cs typeface="맑은 고딕" pitchFamily="34" charset="-120"/>
-              </a:rPr>
-              <a:t>②  변화량 + 방향</a:t>
-            </a:r>
-            <a:endParaRPr lang="en-US" sz="1350" dirty="0"/>
-          </a:p>
-        </p:txBody>
-      </p:sp>
-      <p:sp>
-        <p:nvSpPr>
-          <p:cNvPr id="10" name="Text 8"/>
-          <p:cNvSpPr/>
-          <p:nvPr/>
-        </p:nvSpPr>
-        <p:spPr>
-          <a:xfrm>
-            <a:off x="868680" y="3319272"/>
-            <a:ext cx="2651760" cy="457200"/>
-          </a:xfrm>
-          <a:prstGeom prst="rect">
-            <a:avLst/>
-          </a:prstGeom>
-          <a:noFill/>
-          <a:ln/>
-        </p:spPr>
-        <p:txBody>
-          <a:bodyPr wrap="square" lIns="0" tIns="0" rIns="0" bIns="0" rtlCol="0" anchor="ctr"/>
-          <a:lstStyle/>
-          <a:p>
-            <a:pPr indent="0" marL="0">
-              <a:buNone/>
-            </a:pPr>
-            <a:r>
-              <a:rPr lang="en-US" sz="1200" dirty="0">
-                <a:solidFill>
-                  <a:srgbClr val="6E786B"/>
-                </a:solidFill>
-                <a:latin typeface="맑은 고딕" pitchFamily="34" charset="0"/>
-                <a:ea typeface="맑은 고딕" pitchFamily="34" charset="-122"/>
-                <a:cs typeface="맑은 고딕" pitchFamily="34" charset="-120"/>
-              </a:rPr>
-              <a:t>명령 후 Δ±0.15</a:t>
-            </a:r>
-            <a:endParaRPr lang="en-US" sz="1200" dirty="0"/>
-          </a:p>
-        </p:txBody>
-      </p:sp>
-      <p:sp>
-        <p:nvSpPr>
-          <p:cNvPr id="11" name="Text 9"/>
-          <p:cNvSpPr/>
-          <p:nvPr/>
-        </p:nvSpPr>
-        <p:spPr>
-          <a:xfrm>
-            <a:off x="3611880" y="2953512"/>
-            <a:ext cx="3520440" cy="868680"/>
-          </a:xfrm>
-          <a:prstGeom prst="rect">
-            <a:avLst/>
-          </a:prstGeom>
-          <a:noFill/>
-          <a:ln/>
-        </p:spPr>
-        <p:txBody>
-          <a:bodyPr wrap="square" lIns="0" tIns="0" rIns="0" bIns="0" rtlCol="0" anchor="ctr"/>
-          <a:lstStyle/>
-          <a:p>
-            <a:pPr indent="0" marL="0">
-              <a:lnSpc>
-                <a:spcPts val="1500"/>
-              </a:lnSpc>
-              <a:buNone/>
-            </a:pPr>
-            <a:r>
-              <a:rPr lang="en-US" sz="1050" dirty="0">
-                <a:solidFill>
-                  <a:srgbClr val="6E786B"/>
-                </a:solidFill>
-                <a:latin typeface="맑은 고딕" pitchFamily="34" charset="0"/>
-                <a:ea typeface="맑은 고딕" pitchFamily="34" charset="-122"/>
-                <a:cs typeface="맑은 고딕" pitchFamily="34" charset="-120"/>
-              </a:rPr>
-              <a:t>태양 각도에 따라 방향까지 뒤집힘</a:t>
-            </a:r>
-            <a:endParaRPr lang="en-US" sz="1050" dirty="0"/>
-          </a:p>
-          <a:p>
-            <a:pPr indent="0" marL="0">
-              <a:lnSpc>
-                <a:spcPts val="1500"/>
-              </a:lnSpc>
-              <a:buNone/>
-            </a:pPr>
-            <a:r>
-              <a:rPr lang="en-US" sz="1050" dirty="0">
-                <a:solidFill>
-                  <a:srgbClr val="6E786B"/>
-                </a:solidFill>
-                <a:latin typeface="맑은 고딕" pitchFamily="34" charset="0"/>
-                <a:ea typeface="맑은 고딕" pitchFamily="34" charset="-122"/>
-                <a:cs typeface="맑은 고딕" pitchFamily="34" charset="-120"/>
-              </a:rPr>
-              <a:t>(정상 동작인데 반대 부호 관측)</a:t>
-            </a:r>
-            <a:endParaRPr lang="en-US" sz="1050" dirty="0"/>
-          </a:p>
-        </p:txBody>
-      </p:sp>
-      <p:sp>
-        <p:nvSpPr>
-          <p:cNvPr id="12" name="Shape 10"/>
-          <p:cNvSpPr/>
-          <p:nvPr/>
-        </p:nvSpPr>
-        <p:spPr>
-          <a:xfrm>
-            <a:off x="640080" y="4032504"/>
-            <a:ext cx="6675120" cy="1024128"/>
-          </a:xfrm>
-          <a:prstGeom prst="roundRect">
-            <a:avLst>
-              <a:gd name="adj" fmla="val 8036"/>
+              <a:gd name="adj" fmla="val 5294"/>
             </a:avLst>
           </a:prstGeom>
           <a:solidFill>
@@ -11556,30 +11222,30 @@
       </p:sp>
       <p:sp>
         <p:nvSpPr>
-          <p:cNvPr id="13" name="Text 11"/>
-          <p:cNvSpPr/>
-          <p:nvPr/>
-        </p:nvSpPr>
-        <p:spPr>
-          <a:xfrm>
-            <a:off x="868680" y="4123944"/>
-            <a:ext cx="2377440" cy="329184"/>
-          </a:xfrm>
-          <a:prstGeom prst="rect">
-            <a:avLst/>
-          </a:prstGeom>
-          <a:noFill/>
-          <a:ln/>
-        </p:spPr>
-        <p:txBody>
-          <a:bodyPr wrap="square" lIns="0" tIns="0" rIns="0" bIns="0" rtlCol="0" anchor="ctr"/>
-          <a:lstStyle/>
-          <a:p>
-            <a:pPr indent="0" marL="0">
-              <a:buNone/>
-            </a:pPr>
-            <a:r>
-              <a:rPr lang="en-US" sz="1350" b="1" dirty="0">
+          <p:cNvPr id="5" name="Text 3"/>
+          <p:cNvSpPr/>
+          <p:nvPr/>
+        </p:nvSpPr>
+        <p:spPr>
+          <a:xfrm>
+            <a:off x="914400" y="1874520"/>
+            <a:ext cx="2286000" cy="310896"/>
+          </a:xfrm>
+          <a:prstGeom prst="rect">
+            <a:avLst/>
+          </a:prstGeom>
+          <a:noFill/>
+          <a:ln/>
+        </p:spPr>
+        <p:txBody>
+          <a:bodyPr wrap="square" lIns="0" tIns="0" rIns="0" bIns="0" rtlCol="0" anchor="ctr"/>
+          <a:lstStyle/>
+          <a:p>
+            <a:pPr indent="0" marL="0">
+              <a:buNone/>
+            </a:pPr>
+            <a:r>
+              <a:rPr lang="en-US" sz="1300" b="1" dirty="0">
                 <a:solidFill>
                   <a:srgbClr val="3A5035"/>
                 </a:solidFill>
@@ -11587,38 +11253,52 @@
                 <a:ea typeface="맑은 고딕" pitchFamily="34" charset="-122"/>
                 <a:cs typeface="맑은 고딕" pitchFamily="34" charset="-120"/>
               </a:rPr>
-              <a:t>③  변화량 크기 — 최종</a:t>
-            </a:r>
-            <a:endParaRPr lang="en-US" sz="1350" dirty="0"/>
-          </a:p>
-        </p:txBody>
-      </p:sp>
-      <p:sp>
-        <p:nvSpPr>
-          <p:cNvPr id="14" name="Text 12"/>
-          <p:cNvSpPr/>
-          <p:nvPr/>
-        </p:nvSpPr>
-        <p:spPr>
-          <a:xfrm>
-            <a:off x="868680" y="4489704"/>
-            <a:ext cx="2651760" cy="457200"/>
-          </a:xfrm>
-          <a:prstGeom prst="rect">
-            <a:avLst/>
-          </a:prstGeom>
-          <a:noFill/>
-          <a:ln/>
-        </p:spPr>
-        <p:txBody>
-          <a:bodyPr wrap="square" lIns="0" tIns="0" rIns="0" bIns="0" rtlCol="0" anchor="ctr"/>
-          <a:lstStyle/>
-          <a:p>
-            <a:pPr indent="0" marL="0">
-              <a:buNone/>
-            </a:pPr>
-            <a:r>
-              <a:rPr lang="en-US" sz="1200" b="1" dirty="0">
+              <a:t>판정 기준</a:t>
+            </a:r>
+            <a:endParaRPr lang="en-US" sz="1300" dirty="0"/>
+          </a:p>
+        </p:txBody>
+      </p:sp>
+      <p:sp>
+        <p:nvSpPr>
+          <p:cNvPr id="6" name="Text 4"/>
+          <p:cNvSpPr/>
+          <p:nvPr/>
+        </p:nvSpPr>
+        <p:spPr>
+          <a:xfrm>
+            <a:off x="914400" y="2212848"/>
+            <a:ext cx="6217920" cy="457200"/>
+          </a:xfrm>
+          <a:prstGeom prst="rect">
+            <a:avLst/>
+          </a:prstGeom>
+          <a:noFill/>
+          <a:ln/>
+        </p:spPr>
+        <p:txBody>
+          <a:bodyPr wrap="square" lIns="0" tIns="0" rIns="0" bIns="0" rtlCol="0" anchor="ctr"/>
+          <a:lstStyle/>
+          <a:p>
+            <a:pPr indent="0" marL="0">
+              <a:buNone/>
+            </a:pPr>
+            <a:r>
+              <a:rPr lang="en-US" sz="2000" dirty="0">
+                <a:solidFill>
+                  <a:srgbClr val="1F2420"/>
+                </a:solidFill>
+                <a:latin typeface="맑은 고딕" pitchFamily="34" charset="0"/>
+                <a:ea typeface="맑은 고딕" pitchFamily="34" charset="-122"/>
+                <a:cs typeface="맑은 고딕" pitchFamily="34" charset="-120"/>
+              </a:rPr>
+              <a:t>명령 직후 60초 안에  </a:t>
+            </a:r>
+            <a:pPr indent="0" marL="0">
+              <a:buNone/>
+            </a:pPr>
+            <a:r>
+              <a:rPr lang="en-US" sz="2000" b="1" dirty="0">
                 <a:solidFill>
                   <a:srgbClr val="3A5035"/>
                 </a:solidFill>
@@ -11626,41 +11306,38 @@
                 <a:ea typeface="맑은 고딕" pitchFamily="34" charset="-122"/>
                 <a:cs typeface="맑은 고딕" pitchFamily="34" charset="-120"/>
               </a:rPr>
-              <a:t>명령 직후 60초 내  |Δ| ≥ 0.15</a:t>
-            </a:r>
-            <a:endParaRPr lang="en-US" sz="1200" dirty="0"/>
-          </a:p>
-        </p:txBody>
-      </p:sp>
-      <p:sp>
-        <p:nvSpPr>
-          <p:cNvPr id="15" name="Text 13"/>
-          <p:cNvSpPr/>
-          <p:nvPr/>
-        </p:nvSpPr>
-        <p:spPr>
-          <a:xfrm>
-            <a:off x="3611880" y="4123944"/>
-            <a:ext cx="3520440" cy="868680"/>
-          </a:xfrm>
-          <a:prstGeom prst="rect">
-            <a:avLst/>
-          </a:prstGeom>
-          <a:noFill/>
-          <a:ln/>
-        </p:spPr>
-        <p:txBody>
-          <a:bodyPr wrap="square" lIns="0" tIns="0" rIns="0" bIns="0" rtlCol="0" anchor="ctr"/>
-          <a:lstStyle/>
-          <a:p>
-            <a:pPr indent="0" marL="0">
-              <a:lnSpc>
-                <a:spcPts val="1500"/>
-              </a:lnSpc>
-              <a:buNone/>
-            </a:pPr>
-            <a:r>
-              <a:rPr lang="en-US" sz="1050" dirty="0">
+              <a:t>상대값 변화 0.15 이상</a:t>
+            </a:r>
+            <a:endParaRPr lang="en-US" sz="2000" dirty="0"/>
+          </a:p>
+        </p:txBody>
+      </p:sp>
+      <p:sp>
+        <p:nvSpPr>
+          <p:cNvPr id="7" name="Text 5"/>
+          <p:cNvSpPr/>
+          <p:nvPr/>
+        </p:nvSpPr>
+        <p:spPr>
+          <a:xfrm>
+            <a:off x="914400" y="2724912"/>
+            <a:ext cx="6217920" cy="365760"/>
+          </a:xfrm>
+          <a:prstGeom prst="rect">
+            <a:avLst/>
+          </a:prstGeom>
+          <a:noFill/>
+          <a:ln/>
+        </p:spPr>
+        <p:txBody>
+          <a:bodyPr wrap="square" lIns="0" tIns="0" rIns="0" bIns="0" rtlCol="0" anchor="ctr"/>
+          <a:lstStyle/>
+          <a:p>
+            <a:pPr indent="0" marL="0">
+              <a:buNone/>
+            </a:pPr>
+            <a:r>
+              <a:rPr lang="en-US" sz="1150" dirty="0">
                 <a:solidFill>
                   <a:srgbClr val="6E786B"/>
                 </a:solidFill>
@@ -11668,46 +11345,309 @@
                 <a:ea typeface="맑은 고딕" pitchFamily="34" charset="-122"/>
                 <a:cs typeface="맑은 고딕" pitchFamily="34" charset="-120"/>
               </a:rPr>
-              <a:t>시각·날씨·커튼 상태와 무관</a:t>
-            </a:r>
-            <a:endParaRPr lang="en-US" sz="1050" dirty="0"/>
-          </a:p>
-          <a:p>
-            <a:pPr indent="0" marL="0">
-              <a:lnSpc>
-                <a:spcPts val="1500"/>
-              </a:lnSpc>
-              <a:buNone/>
-            </a:pPr>
-            <a:r>
-              <a:rPr lang="en-US" sz="1050" dirty="0">
-                <a:solidFill>
-                  <a:srgbClr val="6E786B"/>
-                </a:solidFill>
-                <a:latin typeface="맑은 고딕" pitchFamily="34" charset="0"/>
-                <a:ea typeface="맑은 고딕" pitchFamily="34" charset="-122"/>
-                <a:cs typeface="맑은 고딕" pitchFamily="34" charset="-120"/>
-              </a:rPr>
-              <a:t>(ON↔OFF 변화폭은 ~0.31로 안정)</a:t>
-            </a:r>
-            <a:endParaRPr lang="en-US" sz="1050" dirty="0"/>
-          </a:p>
-        </p:txBody>
-      </p:sp>
-      <p:sp>
-        <p:nvSpPr>
-          <p:cNvPr id="16" name="Shape 14"/>
-          <p:cNvSpPr/>
-          <p:nvPr/>
-        </p:nvSpPr>
-        <p:spPr>
-          <a:xfrm>
-            <a:off x="7635240" y="1691640"/>
-            <a:ext cx="3886200" cy="3364992"/>
+              <a:t>마지막 3초 평균과 명령 전 값을 비교 · 실측된 조명 ON↔OFF 변화폭은 약 0.3 — 기준의 2배 여유</a:t>
+            </a:r>
+            <a:endParaRPr lang="en-US" sz="1150" dirty="0"/>
+          </a:p>
+        </p:txBody>
+      </p:sp>
+      <p:sp>
+        <p:nvSpPr>
+          <p:cNvPr id="8" name="Shape 6"/>
+          <p:cNvSpPr/>
+          <p:nvPr/>
+        </p:nvSpPr>
+        <p:spPr>
+          <a:xfrm>
+            <a:off x="640080" y="3520440"/>
+            <a:ext cx="6675120" cy="1691640"/>
           </a:xfrm>
           <a:prstGeom prst="roundRect">
             <a:avLst>
-              <a:gd name="adj" fmla="val 2446"/>
+              <a:gd name="adj" fmla="val 4865"/>
+            </a:avLst>
+          </a:prstGeom>
+          <a:solidFill>
+            <a:srgbClr val="FFFFFF"/>
+          </a:solidFill>
+          <a:ln w="12700">
+            <a:solidFill>
+              <a:srgbClr val="E4E8E1"/>
+            </a:solidFill>
+            <a:prstDash val="solid"/>
+          </a:ln>
+          <a:effectLst>
+            <a:outerShdw sx="100000" sy="100000" kx="0" ky="0" algn="bl" rotWithShape="0" blurRad="127000" dist="25400" dir="5400000">
+              <a:srgbClr val="000000">
+                <a:alpha val="10000"/>
+              </a:srgbClr>
+            </a:outerShdw>
+          </a:effectLst>
+        </p:spPr>
+      </p:sp>
+      <p:sp>
+        <p:nvSpPr>
+          <p:cNvPr id="9" name="Text 7"/>
+          <p:cNvSpPr/>
+          <p:nvPr/>
+        </p:nvSpPr>
+        <p:spPr>
+          <a:xfrm>
+            <a:off x="914400" y="3685032"/>
+            <a:ext cx="6217920" cy="310896"/>
+          </a:xfrm>
+          <a:prstGeom prst="rect">
+            <a:avLst/>
+          </a:prstGeom>
+          <a:noFill/>
+          <a:ln/>
+        </p:spPr>
+        <p:txBody>
+          <a:bodyPr wrap="square" lIns="0" tIns="0" rIns="0" bIns="0" rtlCol="0" anchor="ctr"/>
+          <a:lstStyle/>
+          <a:p>
+            <a:pPr indent="0" marL="0">
+              <a:buNone/>
+            </a:pPr>
+            <a:r>
+              <a:rPr lang="en-US" sz="1350" b="1" dirty="0">
+                <a:solidFill>
+                  <a:srgbClr val="3A5035"/>
+                </a:solidFill>
+                <a:latin typeface="맑은 고딕" pitchFamily="34" charset="0"/>
+                <a:ea typeface="맑은 고딕" pitchFamily="34" charset="-122"/>
+                <a:cs typeface="맑은 고딕" pitchFamily="34" charset="-120"/>
+              </a:rPr>
+              <a:t>절대값이 아니라 변화량을 쓰는 이유 — 시간 구조</a:t>
+            </a:r>
+            <a:endParaRPr lang="en-US" sz="1350" dirty="0"/>
+          </a:p>
+        </p:txBody>
+      </p:sp>
+      <p:sp>
+        <p:nvSpPr>
+          <p:cNvPr id="10" name="Shape 8"/>
+          <p:cNvSpPr/>
+          <p:nvPr/>
+        </p:nvSpPr>
+        <p:spPr>
+          <a:xfrm>
+            <a:off x="914400" y="4096512"/>
+            <a:ext cx="2423160" cy="420624"/>
+          </a:xfrm>
+          <a:prstGeom prst="roundRect">
+            <a:avLst>
+              <a:gd name="adj" fmla="val 17391"/>
+            </a:avLst>
+          </a:prstGeom>
+          <a:solidFill>
+            <a:srgbClr val="97AC8E"/>
+          </a:solidFill>
+          <a:ln w="12700">
+            <a:solidFill>
+              <a:srgbClr val="333333"/>
+            </a:solidFill>
+            <a:prstDash val="solid"/>
+          </a:ln>
+        </p:spPr>
+      </p:sp>
+      <p:sp>
+        <p:nvSpPr>
+          <p:cNvPr id="11" name="Text 9"/>
+          <p:cNvSpPr/>
+          <p:nvPr/>
+        </p:nvSpPr>
+        <p:spPr>
+          <a:xfrm>
+            <a:off x="914400" y="4096512"/>
+            <a:ext cx="2423160" cy="420624"/>
+          </a:xfrm>
+          <a:prstGeom prst="rect">
+            <a:avLst/>
+          </a:prstGeom>
+          <a:noFill/>
+          <a:ln/>
+        </p:spPr>
+        <p:txBody>
+          <a:bodyPr wrap="square" lIns="0" tIns="0" rIns="0" bIns="0" rtlCol="0" anchor="ctr"/>
+          <a:lstStyle/>
+          <a:p>
+            <a:pPr algn="ctr" indent="0" marL="0">
+              <a:buNone/>
+            </a:pPr>
+            <a:r>
+              <a:rPr lang="en-US" sz="1100" b="1" dirty="0">
+                <a:solidFill>
+                  <a:srgbClr val="FFFFFF"/>
+                </a:solidFill>
+                <a:latin typeface="맑은 고딕" pitchFamily="34" charset="0"/>
+                <a:ea typeface="맑은 고딕" pitchFamily="34" charset="-122"/>
+                <a:cs typeface="맑은 고딕" pitchFamily="34" charset="-120"/>
+              </a:rPr>
+              <a:t>채광 (햇빛·구름·커튼)</a:t>
+            </a:r>
+            <a:endParaRPr lang="en-US" sz="1100" dirty="0"/>
+          </a:p>
+        </p:txBody>
+      </p:sp>
+      <p:sp>
+        <p:nvSpPr>
+          <p:cNvPr id="12" name="Text 10"/>
+          <p:cNvSpPr/>
+          <p:nvPr/>
+        </p:nvSpPr>
+        <p:spPr>
+          <a:xfrm>
+            <a:off x="3520440" y="4096512"/>
+            <a:ext cx="3703320" cy="420624"/>
+          </a:xfrm>
+          <a:prstGeom prst="rect">
+            <a:avLst/>
+          </a:prstGeom>
+          <a:noFill/>
+          <a:ln/>
+        </p:spPr>
+        <p:txBody>
+          <a:bodyPr wrap="square" lIns="0" tIns="0" rIns="0" bIns="0" rtlCol="0" anchor="ctr"/>
+          <a:lstStyle/>
+          <a:p>
+            <a:pPr indent="0" marL="0">
+              <a:buNone/>
+            </a:pPr>
+            <a:r>
+              <a:rPr lang="en-US" sz="1100" dirty="0">
+                <a:solidFill>
+                  <a:srgbClr val="1F2420"/>
+                </a:solidFill>
+                <a:latin typeface="맑은 고딕" pitchFamily="34" charset="0"/>
+                <a:ea typeface="맑은 고딕" pitchFamily="34" charset="-122"/>
+                <a:cs typeface="맑은 고딕" pitchFamily="34" charset="-120"/>
+              </a:rPr>
+              <a:t>천천히 변합니다 — 절대 밝기의 기준선을 계속 움직이는 요인</a:t>
+            </a:r>
+            <a:endParaRPr lang="en-US" sz="1100" dirty="0"/>
+          </a:p>
+        </p:txBody>
+      </p:sp>
+      <p:sp>
+        <p:nvSpPr>
+          <p:cNvPr id="13" name="Shape 11"/>
+          <p:cNvSpPr/>
+          <p:nvPr/>
+        </p:nvSpPr>
+        <p:spPr>
+          <a:xfrm>
+            <a:off x="914400" y="4626864"/>
+            <a:ext cx="2423160" cy="420624"/>
+          </a:xfrm>
+          <a:prstGeom prst="roundRect">
+            <a:avLst>
+              <a:gd name="adj" fmla="val 17391"/>
+            </a:avLst>
+          </a:prstGeom>
+          <a:solidFill>
+            <a:srgbClr val="3A5035"/>
+          </a:solidFill>
+          <a:ln w="12700">
+            <a:solidFill>
+              <a:srgbClr val="333333"/>
+            </a:solidFill>
+            <a:prstDash val="solid"/>
+          </a:ln>
+        </p:spPr>
+      </p:sp>
+      <p:sp>
+        <p:nvSpPr>
+          <p:cNvPr id="14" name="Text 12"/>
+          <p:cNvSpPr/>
+          <p:nvPr/>
+        </p:nvSpPr>
+        <p:spPr>
+          <a:xfrm>
+            <a:off x="914400" y="4626864"/>
+            <a:ext cx="2423160" cy="420624"/>
+          </a:xfrm>
+          <a:prstGeom prst="rect">
+            <a:avLst/>
+          </a:prstGeom>
+          <a:noFill/>
+          <a:ln/>
+        </p:spPr>
+        <p:txBody>
+          <a:bodyPr wrap="square" lIns="0" tIns="0" rIns="0" bIns="0" rtlCol="0" anchor="ctr"/>
+          <a:lstStyle/>
+          <a:p>
+            <a:pPr algn="ctr" indent="0" marL="0">
+              <a:buNone/>
+            </a:pPr>
+            <a:r>
+              <a:rPr lang="en-US" sz="1100" b="1" dirty="0">
+                <a:solidFill>
+                  <a:srgbClr val="FFFFFF"/>
+                </a:solidFill>
+                <a:latin typeface="맑은 고딕" pitchFamily="34" charset="0"/>
+                <a:ea typeface="맑은 고딕" pitchFamily="34" charset="-122"/>
+                <a:cs typeface="맑은 고딕" pitchFamily="34" charset="-120"/>
+              </a:rPr>
+              <a:t>가전 (조명·커튼 모터)</a:t>
+            </a:r>
+            <a:endParaRPr lang="en-US" sz="1100" dirty="0"/>
+          </a:p>
+        </p:txBody>
+      </p:sp>
+      <p:sp>
+        <p:nvSpPr>
+          <p:cNvPr id="15" name="Text 13"/>
+          <p:cNvSpPr/>
+          <p:nvPr/>
+        </p:nvSpPr>
+        <p:spPr>
+          <a:xfrm>
+            <a:off x="3520440" y="4626864"/>
+            <a:ext cx="3703320" cy="420624"/>
+          </a:xfrm>
+          <a:prstGeom prst="rect">
+            <a:avLst/>
+          </a:prstGeom>
+          <a:noFill/>
+          <a:ln/>
+        </p:spPr>
+        <p:txBody>
+          <a:bodyPr wrap="square" lIns="0" tIns="0" rIns="0" bIns="0" rtlCol="0" anchor="ctr"/>
+          <a:lstStyle/>
+          <a:p>
+            <a:pPr indent="0" marL="0">
+              <a:buNone/>
+            </a:pPr>
+            <a:r>
+              <a:rPr lang="en-US" sz="1100" dirty="0">
+                <a:solidFill>
+                  <a:srgbClr val="1F2420"/>
+                </a:solidFill>
+                <a:latin typeface="맑은 고딕" pitchFamily="34" charset="0"/>
+                <a:ea typeface="맑은 고딕" pitchFamily="34" charset="-122"/>
+                <a:cs typeface="맑은 고딕" pitchFamily="34" charset="-120"/>
+              </a:rPr>
+              <a:t>명령 직후 급변합니다 — 60초 안의 큰 변화는 가전의 반응</a:t>
+            </a:r>
+            <a:endParaRPr lang="en-US" sz="1100" dirty="0"/>
+          </a:p>
+        </p:txBody>
+      </p:sp>
+      <p:sp>
+        <p:nvSpPr>
+          <p:cNvPr id="16" name="Shape 14"/>
+          <p:cNvSpPr/>
+          <p:nvPr/>
+        </p:nvSpPr>
+        <p:spPr>
+          <a:xfrm>
+            <a:off x="7635240" y="1691640"/>
+            <a:ext cx="3886200" cy="3520440"/>
+          </a:xfrm>
+          <a:prstGeom prst="roundRect">
+            <a:avLst>
+              <a:gd name="adj" fmla="val 2338"/>
             </a:avLst>
           </a:prstGeom>
           <a:solidFill>
@@ -11754,7 +11694,7 @@
                 <a:ea typeface="맑은 고딕" pitchFamily="34" charset="-122"/>
                 <a:cs typeface="맑은 고딕" pitchFamily="34" charset="-120"/>
               </a:rPr>
-              <a:t>판정 근거의 시간 구조</a:t>
+              <a:t>이 기준의 성질</a:t>
             </a:r>
             <a:endParaRPr lang="en-US" sz="1350" dirty="0"/>
           </a:p>
@@ -11769,7 +11709,7 @@
         <p:spPr>
           <a:xfrm>
             <a:off x="7863840" y="2212848"/>
-            <a:ext cx="3474720" cy="2743200"/>
+            <a:ext cx="3474720" cy="2926080"/>
           </a:xfrm>
           <a:prstGeom prst="rect">
             <a:avLst/>
@@ -11796,7 +11736,7 @@
                 <a:ea typeface="맑은 고딕" pitchFamily="34" charset="-122"/>
                 <a:cs typeface="맑은 고딕" pitchFamily="34" charset="-120"/>
               </a:rPr>
-              <a:t>채광(햇빛·구름)은 천천히 변하고,</a:t>
+              <a:t>시각·날씨·커튼 상태와 무관하게</a:t>
             </a:r>
             <a:endParaRPr lang="en-US" sz="1150" dirty="0"/>
           </a:p>
@@ -11816,7 +11756,7 @@
                 <a:ea typeface="맑은 고딕" pitchFamily="34" charset="-122"/>
                 <a:cs typeface="맑은 고딕" pitchFamily="34" charset="-120"/>
               </a:rPr>
-              <a:t>가전은 명령 직후에 급변합니다.</a:t>
+              <a:t>같은 기준이 성립합니다 — 아침</a:t>
             </a:r>
             <a:endParaRPr lang="en-US" sz="1150" dirty="0"/>
           </a:p>
@@ -11827,6 +11767,17 @@
               </a:lnSpc>
               <a:buNone/>
             </a:pPr>
+            <a:r>
+              <a:rPr lang="en-US" sz="1150" dirty="0">
+                <a:solidFill>
+                  <a:srgbClr val="1F2420"/>
+                </a:solidFill>
+                <a:latin typeface="맑은 고딕" pitchFamily="34" charset="0"/>
+                <a:ea typeface="맑은 고딕" pitchFamily="34" charset="-122"/>
+                <a:cs typeface="맑은 고딕" pitchFamily="34" charset="-120"/>
+              </a:rPr>
+              <a:t>점검과 낮 시험에 다른 임계값이</a:t>
+            </a:r>
             <a:endParaRPr lang="en-US" sz="1150" dirty="0"/>
           </a:p>
           <a:p>
@@ -11845,7 +11796,7 @@
                 <a:ea typeface="맑은 고딕" pitchFamily="34" charset="-122"/>
                 <a:cs typeface="맑은 고딕" pitchFamily="34" charset="-120"/>
               </a:rPr>
-              <a:t>그래서 "명령 직후 60초" 안의 큰</a:t>
+              <a:t>필요 없습니다.</a:t>
             </a:r>
             <a:endParaRPr lang="en-US" sz="1150" dirty="0"/>
           </a:p>
@@ -11856,17 +11807,6 @@
               </a:lnSpc>
               <a:buNone/>
             </a:pPr>
-            <a:r>
-              <a:rPr lang="en-US" sz="1150" dirty="0">
-                <a:solidFill>
-                  <a:srgbClr val="1F2420"/>
-                </a:solidFill>
-                <a:latin typeface="맑은 고딕" pitchFamily="34" charset="0"/>
-                <a:ea typeface="맑은 고딕" pitchFamily="34" charset="-122"/>
-                <a:cs typeface="맑은 고딕" pitchFamily="34" charset="-120"/>
-              </a:rPr>
-              <a:t>변화는 가전의 반응이라고 판단할</a:t>
-            </a:r>
             <a:endParaRPr lang="en-US" sz="1150" dirty="0"/>
           </a:p>
           <a:p>
@@ -11885,7 +11825,7 @@
                 <a:ea typeface="맑은 고딕" pitchFamily="34" charset="-122"/>
                 <a:cs typeface="맑은 고딕" pitchFamily="34" charset="-120"/>
               </a:rPr>
-              <a:t>수 있습니다 — 무인 점검에는 조명을</a:t>
+              <a:t>무인 점검에는 조명을 만질 사람이</a:t>
             </a:r>
             <a:endParaRPr lang="en-US" sz="1150" dirty="0"/>
           </a:p>
@@ -11905,7 +11845,7 @@
                 <a:ea typeface="맑은 고딕" pitchFamily="34" charset="-122"/>
                 <a:cs typeface="맑은 고딕" pitchFamily="34" charset="-120"/>
               </a:rPr>
-              <a:t>만질 사람도 없습니다.</a:t>
+              <a:t>없으므로, 명령 직후의 급격한 변화</a:t>
             </a:r>
             <a:endParaRPr lang="en-US" sz="1150" dirty="0"/>
           </a:p>
@@ -11916,6 +11856,17 @@
               </a:lnSpc>
               <a:buNone/>
             </a:pPr>
+            <a:r>
+              <a:rPr lang="en-US" sz="1150" dirty="0">
+                <a:solidFill>
+                  <a:srgbClr val="1F2420"/>
+                </a:solidFill>
+                <a:latin typeface="맑은 고딕" pitchFamily="34" charset="0"/>
+                <a:ea typeface="맑은 고딕" pitchFamily="34" charset="-122"/>
+                <a:cs typeface="맑은 고딕" pitchFamily="34" charset="-120"/>
+              </a:rPr>
+              <a:t>= 가전이 반응했다는 증거입니다.</a:t>
+            </a:r>
             <a:endParaRPr lang="en-US" sz="1150" dirty="0"/>
           </a:p>
           <a:p>
@@ -11925,17 +11876,6 @@
               </a:lnSpc>
               <a:buNone/>
             </a:pPr>
-            <a:r>
-              <a:rPr lang="en-US" sz="1150" dirty="0">
-                <a:solidFill>
-                  <a:srgbClr val="1F2420"/>
-                </a:solidFill>
-                <a:latin typeface="맑은 고딕" pitchFamily="34" charset="0"/>
-                <a:ea typeface="맑은 고딕" pitchFamily="34" charset="-122"/>
-                <a:cs typeface="맑은 고딕" pitchFamily="34" charset="-120"/>
-              </a:rPr>
-              <a:t>변화가 시작되기까지의 시간은</a:t>
-            </a:r>
             <a:endParaRPr lang="en-US" sz="1150" dirty="0"/>
           </a:p>
           <a:p>
@@ -11954,7 +11894,7 @@
                 <a:ea typeface="맑은 고딕" pitchFamily="34" charset="-122"/>
                 <a:cs typeface="맑은 고딕" pitchFamily="34" charset="-120"/>
               </a:rPr>
-              <a:t>가전 반응 시간으로 함께 기록됩니다</a:t>
+              <a:t>변화가 시작되기까지의 시간은</a:t>
             </a:r>
             <a:endParaRPr lang="en-US" sz="1150" dirty="0"/>
           </a:p>
@@ -11974,6 +11914,26 @@
                 <a:ea typeface="맑은 고딕" pitchFamily="34" charset="-122"/>
                 <a:cs typeface="맑은 고딕" pitchFamily="34" charset="-120"/>
               </a:rPr>
+              <a:t>가전 반응 시간으로 함께 기록됩니다</a:t>
+            </a:r>
+            <a:endParaRPr lang="en-US" sz="1150" dirty="0"/>
+          </a:p>
+          <a:p>
+            <a:pPr indent="0" marL="0">
+              <a:lnSpc>
+                <a:spcPts val="1800"/>
+              </a:lnSpc>
+              <a:buNone/>
+            </a:pPr>
+            <a:r>
+              <a:rPr lang="en-US" sz="1150" dirty="0">
+                <a:solidFill>
+                  <a:srgbClr val="1F2420"/>
+                </a:solidFill>
+                <a:latin typeface="맑은 고딕" pitchFamily="34" charset="0"/>
+                <a:ea typeface="맑은 고딕" pitchFamily="34" charset="-122"/>
+                <a:cs typeface="맑은 고딕" pitchFamily="34" charset="-120"/>
+              </a:rPr>
               <a:t>(응답 시작의 물리 동작판 지표).</a:t>
             </a:r>
             <a:endParaRPr lang="en-US" sz="1150" dirty="0"/>
@@ -11988,12 +11948,12 @@
         </p:nvSpPr>
         <p:spPr>
           <a:xfrm>
-            <a:off x="640080" y="5285232"/>
-            <a:ext cx="10881360" cy="914400"/>
+            <a:off x="640080" y="5440680"/>
+            <a:ext cx="10881360" cy="777240"/>
           </a:xfrm>
           <a:prstGeom prst="roundRect">
             <a:avLst>
-              <a:gd name="adj" fmla="val 9000"/>
+              <a:gd name="adj" fmla="val 10588"/>
             </a:avLst>
           </a:prstGeom>
           <a:solidFill>
@@ -12015,24 +11975,24 @@
         </p:nvSpPr>
         <p:spPr>
           <a:xfrm>
-            <a:off x="914400" y="5285232"/>
-            <a:ext cx="10332720" cy="914400"/>
-          </a:xfrm>
-          <a:prstGeom prst="rect">
-            <a:avLst/>
-          </a:prstGeom>
-          <a:noFill/>
-          <a:ln/>
-        </p:spPr>
-        <p:txBody>
-          <a:bodyPr wrap="square" lIns="0" tIns="0" rIns="0" bIns="0" rtlCol="0" anchor="ctr"/>
-          <a:lstStyle/>
-          <a:p>
-            <a:pPr indent="0" marL="0">
-              <a:buNone/>
-            </a:pPr>
-            <a:r>
-              <a:rPr lang="en-US" sz="1350" b="1" dirty="0">
+            <a:off x="914400" y="5440680"/>
+            <a:ext cx="10332720" cy="777240"/>
+          </a:xfrm>
+          <a:prstGeom prst="rect">
+            <a:avLst/>
+          </a:prstGeom>
+          <a:noFill/>
+          <a:ln/>
+        </p:spPr>
+        <p:txBody>
+          <a:bodyPr wrap="square" lIns="0" tIns="0" rIns="0" bIns="0" rtlCol="0" anchor="ctr"/>
+          <a:lstStyle/>
+          <a:p>
+            <a:pPr indent="0" marL="0">
+              <a:buNone/>
+            </a:pPr>
+            <a:r>
+              <a:rPr lang="en-US" sz="1300" b="1" dirty="0">
                 <a:solidFill>
                   <a:srgbClr val="3A5035"/>
                 </a:solidFill>
@@ -12040,13 +12000,13 @@
                 <a:ea typeface="맑은 고딕" pitchFamily="34" charset="-122"/>
                 <a:cs typeface="맑은 고딕" pitchFamily="34" charset="-120"/>
               </a:rPr>
-              <a:t>실측 → 수정 → 재실측. </a:t>
-            </a:r>
-            <a:pPr indent="0" marL="0">
-              <a:buNone/>
-            </a:pPr>
-            <a:r>
-              <a:rPr lang="en-US" sz="1350" dirty="0">
+              <a:t>판정에 쓰는 연산은 평균과 나눗셈뿐입니다. </a:t>
+            </a:r>
+            <a:pPr indent="0" marL="0">
+              <a:buNone/>
+            </a:pPr>
+            <a:r>
+              <a:rPr lang="en-US" sz="1300" dirty="0">
                 <a:solidFill>
                   <a:srgbClr val="1F2420"/>
                 </a:solidFill>
@@ -12054,9 +12014,9 @@
                 <a:ea typeface="맑은 고딕" pitchFamily="34" charset="-122"/>
                 <a:cs typeface="맑은 고딕" pitchFamily="34" charset="-120"/>
               </a:rPr>
-              <a:t>하루 세 번의 현장 실측이 판정 기준을 세 번 바꿨습니다 — 점검 시스템이 정교해지는 방식 그 자체입니다.</a:t>
-            </a:r>
-            <a:endParaRPr lang="en-US" sz="1350" dirty="0"/>
+              <a:t>같은 입력에는 항상 같은 결과 — 검증·설명·재현이 가능한 결정적 판정입니다.</a:t>
+            </a:r>
+            <a:endParaRPr lang="en-US" sz="1300" dirty="0"/>
           </a:p>
         </p:txBody>
       </p:sp>
@@ -13865,7 +13825,7 @@
                 <a:ea typeface="맑은 고딕" pitchFamily="34" charset="-122"/>
                 <a:cs typeface="맑은 고딕" pitchFamily="34" charset="-120"/>
               </a:rPr>
-              <a:t>저장합니다. 판정 결과에 의문이 생기면 원본을 다시 듣고</a:t>
+              <a:t>저장합니다.</a:t>
             </a:r>
             <a:endParaRPr lang="en-US" sz="1150" dirty="0"/>
           </a:p>
@@ -13876,17 +13836,6 @@
               </a:lnSpc>
               <a:buNone/>
             </a:pPr>
-            <a:r>
-              <a:rPr lang="en-US" sz="1150" dirty="0">
-                <a:solidFill>
-                  <a:srgbClr val="1F2420"/>
-                </a:solidFill>
-                <a:latin typeface="맑은 고딕" pitchFamily="34" charset="0"/>
-                <a:ea typeface="맑은 고딕" pitchFamily="34" charset="-122"/>
-                <a:cs typeface="맑은 고딕" pitchFamily="34" charset="-120"/>
-              </a:rPr>
-              <a:t>볼 수 있습니다.</a:t>
-            </a:r>
             <a:endParaRPr lang="en-US" sz="1150" dirty="0"/>
           </a:p>
           <a:p>
@@ -13896,6 +13845,17 @@
               </a:lnSpc>
               <a:buNone/>
             </a:pPr>
+            <a:r>
+              <a:rPr lang="en-US" sz="1150" dirty="0">
+                <a:solidFill>
+                  <a:srgbClr val="1F2420"/>
+                </a:solidFill>
+                <a:latin typeface="맑은 고딕" pitchFamily="34" charset="0"/>
+                <a:ea typeface="맑은 고딕" pitchFamily="34" charset="-122"/>
+                <a:cs typeface="맑은 고딕" pitchFamily="34" charset="-120"/>
+              </a:rPr>
+              <a:t>판정 결과에 의문이 생기면 언제든 원본을 다시 듣고 볼 수</a:t>
+            </a:r>
             <a:endParaRPr lang="en-US" sz="1150" dirty="0"/>
           </a:p>
           <a:p>
@@ -13914,7 +13874,7 @@
                 <a:ea typeface="맑은 고딕" pitchFamily="34" charset="-122"/>
                 <a:cs typeface="맑은 고딕" pitchFamily="34" charset="-120"/>
               </a:rPr>
-              <a:t>실제로 이 원칙 덕분에 "확답 이후의 실행 선언이 녹음 창</a:t>
+              <a:t>있어, 실패 원인 추적과 판정 신뢰성 확인이 가능합니다.</a:t>
             </a:r>
             <a:endParaRPr lang="en-US" sz="1150" dirty="0"/>
           </a:p>
@@ -13934,7 +13894,7 @@
                 <a:ea typeface="맑은 고딕" pitchFamily="34" charset="-122"/>
                 <a:cs typeface="맑은 고딕" pitchFamily="34" charset="-120"/>
               </a:rPr>
-              <a:t>밖"이라는 관측 맹점을 발견해 고쳤고, "음성 루틴 실행은</a:t>
+              <a:t>L2의 인식 문장 기록과 함께, 모든 판정이 "왜 그렇게</a:t>
             </a:r>
             <a:endParaRPr lang="en-US" sz="1150" dirty="0"/>
           </a:p>
@@ -13954,7 +13914,7 @@
                 <a:ea typeface="맑은 고딕" pitchFamily="34" charset="-122"/>
                 <a:cs typeface="맑은 고딕" pitchFamily="34" charset="-120"/>
               </a:rPr>
-              <a:t>인식이 취약하다"는 실전 이슈도 확보했습니다.</a:t>
+              <a:t>판정했는지"를 증거로 설명할 수 있는 구조입니다.</a:t>
             </a:r>
             <a:endParaRPr lang="en-US" sz="1150" dirty="0"/>
           </a:p>

--- a/thinqreal/fieldcheck/FieldCheck_진행보고_20260805.pptx
+++ b/thinqreal/fieldcheck/FieldCheck_진행보고_20260805.pptx
@@ -10945,11 +10945,11 @@
             </a:avLst>
           </a:prstGeom>
           <a:solidFill>
-            <a:srgbClr val="F4F6F2"/>
+            <a:srgbClr val="EFF3EC"/>
           </a:solidFill>
           <a:ln w="12700">
             <a:solidFill>
-              <a:srgbClr val="E4E8E1"/>
+              <a:srgbClr val="3A5035"/>
             </a:solidFill>
             <a:prstDash val="solid"/>
           </a:ln>
@@ -10963,7 +10963,46 @@
         </p:nvSpPr>
         <p:spPr>
           <a:xfrm>
-            <a:off x="6784848" y="4206240"/>
+            <a:off x="6784848" y="4169664"/>
+            <a:ext cx="4526280" cy="292608"/>
+          </a:xfrm>
+          <a:prstGeom prst="rect">
+            <a:avLst/>
+          </a:prstGeom>
+          <a:noFill/>
+          <a:ln/>
+        </p:spPr>
+        <p:txBody>
+          <a:bodyPr wrap="square" lIns="0" tIns="0" rIns="0" bIns="0" rtlCol="0" anchor="ctr"/>
+          <a:lstStyle/>
+          <a:p>
+            <a:pPr indent="0" marL="0">
+              <a:buNone/>
+            </a:pPr>
+            <a:r>
+              <a:rPr lang="en-US" sz="1350" b="1" dirty="0">
+                <a:solidFill>
+                  <a:srgbClr val="3A5035"/>
+                </a:solidFill>
+                <a:latin typeface="맑은 고딕" pitchFamily="34" charset="0"/>
+                <a:ea typeface="맑은 고딕" pitchFamily="34" charset="-122"/>
+                <a:cs typeface="맑은 고딕" pitchFamily="34" charset="-120"/>
+              </a:rPr>
+              <a:t>실측 계산 예 — 이 숫자로 판정합니다 (현장 측정값)</a:t>
+            </a:r>
+            <a:endParaRPr lang="en-US" sz="1350" dirty="0"/>
+          </a:p>
+        </p:txBody>
+      </p:sp>
+      <p:sp>
+        <p:nvSpPr>
+          <p:cNvPr id="19" name="Text 17"/>
+          <p:cNvSpPr/>
+          <p:nvPr/>
+        </p:nvSpPr>
+        <p:spPr>
+          <a:xfrm>
+            <a:off x="6784848" y="4498848"/>
             <a:ext cx="4526280" cy="310896"/>
           </a:xfrm>
           <a:prstGeom prst="rect">
@@ -10980,6 +11019,177 @@
               <a:buNone/>
             </a:pPr>
             <a:r>
+              <a:rPr lang="en-US" sz="1250" dirty="0">
+                <a:solidFill>
+                  <a:srgbClr val="6E786B"/>
+                </a:solidFill>
+                <a:latin typeface="맑은 고딕" pitchFamily="34" charset="0"/>
+                <a:ea typeface="맑은 고딕" pitchFamily="34" charset="-122"/>
+                <a:cs typeface="맑은 고딕" pitchFamily="34" charset="-120"/>
+              </a:rPr>
+              <a:t>한 표본:  </a:t>
+            </a:r>
+            <a:pPr indent="0" marL="0">
+              <a:buNone/>
+            </a:pPr>
+            <a:r>
+              <a:rPr lang="en-US" sz="1250" b="1" dirty="0">
+                <a:solidFill>
+                  <a:srgbClr val="1F2420"/>
+                </a:solidFill>
+                <a:latin typeface="맑은 고딕" pitchFamily="34" charset="0"/>
+                <a:ea typeface="맑은 고딕" pitchFamily="34" charset="-122"/>
+                <a:cs typeface="맑은 고딕" pitchFamily="34" charset="-120"/>
+              </a:rPr>
+              <a:t>대상 74.5 ÷ 참조 78.3 = 0.951</a:t>
+            </a:r>
+            <a:endParaRPr lang="en-US" sz="1250" dirty="0"/>
+          </a:p>
+        </p:txBody>
+      </p:sp>
+      <p:sp>
+        <p:nvSpPr>
+          <p:cNvPr id="20" name="Text 18"/>
+          <p:cNvSpPr/>
+          <p:nvPr/>
+        </p:nvSpPr>
+        <p:spPr>
+          <a:xfrm>
+            <a:off x="6784848" y="4846320"/>
+            <a:ext cx="4526280" cy="310896"/>
+          </a:xfrm>
+          <a:prstGeom prst="rect">
+            <a:avLst/>
+          </a:prstGeom>
+          <a:noFill/>
+          <a:ln/>
+        </p:spPr>
+        <p:txBody>
+          <a:bodyPr wrap="square" lIns="0" tIns="0" rIns="0" bIns="0" rtlCol="0" anchor="ctr"/>
+          <a:lstStyle/>
+          <a:p>
+            <a:pPr indent="0" marL="0">
+              <a:buNone/>
+            </a:pPr>
+            <a:r>
+              <a:rPr lang="en-US" sz="1250" dirty="0">
+                <a:solidFill>
+                  <a:srgbClr val="6E786B"/>
+                </a:solidFill>
+                <a:latin typeface="맑은 고딕" pitchFamily="34" charset="0"/>
+                <a:ea typeface="맑은 고딕" pitchFamily="34" charset="-122"/>
+                <a:cs typeface="맑은 고딕" pitchFamily="34" charset="-120"/>
+              </a:rPr>
+              <a:t>조명 꺼짐  </a:t>
+            </a:r>
+            <a:pPr indent="0" marL="0">
+              <a:buNone/>
+            </a:pPr>
+            <a:r>
+              <a:rPr lang="en-US" sz="1250" b="1" dirty="0">
+                <a:solidFill>
+                  <a:srgbClr val="1F2420"/>
+                </a:solidFill>
+                <a:latin typeface="맑은 고딕" pitchFamily="34" charset="0"/>
+                <a:ea typeface="맑은 고딕" pitchFamily="34" charset="-122"/>
+                <a:cs typeface="맑은 고딕" pitchFamily="34" charset="-120"/>
+              </a:rPr>
+              <a:t>0.746</a:t>
+            </a:r>
+            <a:pPr indent="0" marL="0">
+              <a:buNone/>
+            </a:pPr>
+            <a:r>
+              <a:rPr lang="en-US" sz="1250" dirty="0">
+                <a:solidFill>
+                  <a:srgbClr val="6E786B"/>
+                </a:solidFill>
+                <a:latin typeface="맑은 고딕" pitchFamily="34" charset="0"/>
+                <a:ea typeface="맑은 고딕" pitchFamily="34" charset="-122"/>
+                <a:cs typeface="맑은 고딕" pitchFamily="34" charset="-120"/>
+              </a:rPr>
+              <a:t>      조명 켜짐  </a:t>
+            </a:r>
+            <a:pPr indent="0" marL="0">
+              <a:buNone/>
+            </a:pPr>
+            <a:r>
+              <a:rPr lang="en-US" sz="1250" b="1" dirty="0">
+                <a:solidFill>
+                  <a:srgbClr val="1F2420"/>
+                </a:solidFill>
+                <a:latin typeface="맑은 고딕" pitchFamily="34" charset="0"/>
+                <a:ea typeface="맑은 고딕" pitchFamily="34" charset="-122"/>
+                <a:cs typeface="맑은 고딕" pitchFamily="34" charset="-120"/>
+              </a:rPr>
+              <a:t>1.063</a:t>
+            </a:r>
+            <a:endParaRPr lang="en-US" sz="1250" dirty="0"/>
+          </a:p>
+        </p:txBody>
+      </p:sp>
+      <p:sp>
+        <p:nvSpPr>
+          <p:cNvPr id="21" name="Shape 19"/>
+          <p:cNvSpPr/>
+          <p:nvPr/>
+        </p:nvSpPr>
+        <p:spPr>
+          <a:xfrm>
+            <a:off x="6784848" y="5230368"/>
+            <a:ext cx="4480560" cy="0"/>
+          </a:xfrm>
+          <a:prstGeom prst="line">
+            <a:avLst/>
+          </a:prstGeom>
+          <a:noFill/>
+          <a:ln w="9525">
+            <a:solidFill>
+              <a:srgbClr val="97AC8E"/>
+            </a:solidFill>
+            <a:prstDash val="solid"/>
+          </a:ln>
+        </p:spPr>
+      </p:sp>
+      <p:sp>
+        <p:nvSpPr>
+          <p:cNvPr id="22" name="Text 20"/>
+          <p:cNvSpPr/>
+          <p:nvPr/>
+        </p:nvSpPr>
+        <p:spPr>
+          <a:xfrm>
+            <a:off x="6784848" y="5321808"/>
+            <a:ext cx="4526280" cy="347472"/>
+          </a:xfrm>
+          <a:prstGeom prst="rect">
+            <a:avLst/>
+          </a:prstGeom>
+          <a:noFill/>
+          <a:ln/>
+        </p:spPr>
+        <p:txBody>
+          <a:bodyPr wrap="square" lIns="0" tIns="0" rIns="0" bIns="0" rtlCol="0" anchor="ctr"/>
+          <a:lstStyle/>
+          <a:p>
+            <a:pPr indent="0" marL="0">
+              <a:buNone/>
+            </a:pPr>
+            <a:r>
+              <a:rPr lang="en-US" sz="1350" dirty="0">
+                <a:solidFill>
+                  <a:srgbClr val="1F2420"/>
+                </a:solidFill>
+                <a:latin typeface="맑은 고딕" pitchFamily="34" charset="0"/>
+                <a:ea typeface="맑은 고딕" pitchFamily="34" charset="-122"/>
+                <a:cs typeface="맑은 고딕" pitchFamily="34" charset="-120"/>
+              </a:rPr>
+              <a:t>판정:  |1.063 − 0.746| = </a:t>
+            </a:r>
+            <a:pPr indent="0" marL="0">
+              <a:buNone/>
+            </a:pPr>
+            <a:r>
               <a:rPr lang="en-US" sz="1350" b="1" dirty="0">
                 <a:solidFill>
                   <a:srgbClr val="3A5035"/>
@@ -10988,7 +11198,35 @@
                 <a:ea typeface="맑은 고딕" pitchFamily="34" charset="-122"/>
                 <a:cs typeface="맑은 고딕" pitchFamily="34" charset="-120"/>
               </a:rPr>
-              <a:t>현장 실측으로 판정 가능성이 확인됐습니다</a:t>
+              <a:t>0.317 ≥ 0.15</a:t>
+            </a:r>
+            <a:pPr indent="0" marL="0">
+              <a:buNone/>
+            </a:pPr>
+            <a:r>
+              <a:rPr lang="en-US" sz="1350" dirty="0">
+                <a:solidFill>
+                  <a:srgbClr val="1F2420"/>
+                </a:solidFill>
+                <a:latin typeface="맑은 고딕" pitchFamily="34" charset="0"/>
+                <a:ea typeface="맑은 고딕" pitchFamily="34" charset="-122"/>
+                <a:cs typeface="맑은 고딕" pitchFamily="34" charset="-120"/>
+              </a:rPr>
+              <a:t>  →  </a:t>
+            </a:r>
+            <a:pPr indent="0" marL="0">
+              <a:buNone/>
+            </a:pPr>
+            <a:r>
+              <a:rPr lang="en-US" sz="1350" b="1" dirty="0">
+                <a:solidFill>
+                  <a:srgbClr val="3A5035"/>
+                </a:solidFill>
+                <a:latin typeface="맑은 고딕" pitchFamily="34" charset="0"/>
+                <a:ea typeface="맑은 고딕" pitchFamily="34" charset="-122"/>
+                <a:cs typeface="맑은 고딕" pitchFamily="34" charset="-120"/>
+              </a:rPr>
+              <a:t>동작함</a:t>
             </a:r>
             <a:endParaRPr lang="en-US" sz="1350" dirty="0"/>
           </a:p>
@@ -10996,83 +11234,40 @@
       </p:sp>
       <p:sp>
         <p:nvSpPr>
-          <p:cNvPr id="19" name="Text 17"/>
-          <p:cNvSpPr/>
-          <p:nvPr/>
-        </p:nvSpPr>
-        <p:spPr>
-          <a:xfrm>
-            <a:off x="6784848" y="4572000"/>
-            <a:ext cx="4526280" cy="1280160"/>
-          </a:xfrm>
-          <a:prstGeom prst="rect">
-            <a:avLst/>
-          </a:prstGeom>
-          <a:noFill/>
-          <a:ln/>
-        </p:spPr>
-        <p:txBody>
-          <a:bodyPr wrap="square" lIns="0" tIns="0" rIns="0" bIns="0" rtlCol="0" anchor="ctr"/>
-          <a:lstStyle/>
-          <a:p>
-            <a:pPr indent="0" marL="0">
-              <a:lnSpc>
-                <a:spcPts val="1900"/>
-              </a:lnSpc>
-              <a:buNone/>
-            </a:pPr>
-            <a:r>
-              <a:rPr lang="en-US" sz="1200" dirty="0">
-                <a:solidFill>
-                  <a:srgbClr val="1F2420"/>
-                </a:solidFill>
-                <a:latin typeface="맑은 고딕" pitchFamily="34" charset="0"/>
-                <a:ea typeface="맑은 고딕" pitchFamily="34" charset="-122"/>
-                <a:cs typeface="맑은 고딕" pitchFamily="34" charset="-120"/>
-              </a:rPr>
-              <a:t>참조 벽의 절대 밝기가 49 출렁이는 동안(방 전체 반사 +</a:t>
-            </a:r>
-            <a:endParaRPr lang="en-US" sz="1200" dirty="0"/>
-          </a:p>
-          <a:p>
-            <a:pPr indent="0" marL="0">
-              <a:lnSpc>
-                <a:spcPts val="1900"/>
-              </a:lnSpc>
-              <a:buNone/>
-            </a:pPr>
-            <a:r>
-              <a:rPr lang="en-US" sz="1200" dirty="0">
-                <a:solidFill>
-                  <a:srgbClr val="1F2420"/>
-                </a:solidFill>
-                <a:latin typeface="맑은 고딕" pitchFamily="34" charset="0"/>
-                <a:ea typeface="맑은 고딕" pitchFamily="34" charset="-122"/>
-                <a:cs typeface="맑은 고딕" pitchFamily="34" charset="-120"/>
-              </a:rPr>
-              <a:t>자동 노출) 상대값은 꺼짐 0.75 ↔ 켜짐 1.06으로 선명하게</a:t>
-            </a:r>
-            <a:endParaRPr lang="en-US" sz="1200" dirty="0"/>
-          </a:p>
-          <a:p>
-            <a:pPr indent="0" marL="0">
-              <a:lnSpc>
-                <a:spcPts val="1900"/>
-              </a:lnSpc>
-              <a:buNone/>
-            </a:pPr>
-            <a:r>
-              <a:rPr lang="en-US" sz="1200" dirty="0">
-                <a:solidFill>
-                  <a:srgbClr val="1F2420"/>
-                </a:solidFill>
-                <a:latin typeface="맑은 고딕" pitchFamily="34" charset="0"/>
-                <a:ea typeface="맑은 고딕" pitchFamily="34" charset="-122"/>
-                <a:cs typeface="맑은 고딕" pitchFamily="34" charset="-120"/>
-              </a:rPr>
-              <a:t>갈라졌습니다 — 조명 상태가 수치로 구분됩니다.</a:t>
-            </a:r>
-            <a:endParaRPr lang="en-US" sz="1200" dirty="0"/>
+          <p:cNvPr id="23" name="Text 21"/>
+          <p:cNvSpPr/>
+          <p:nvPr/>
+        </p:nvSpPr>
+        <p:spPr>
+          <a:xfrm>
+            <a:off x="6784848" y="5687568"/>
+            <a:ext cx="4526280" cy="274320"/>
+          </a:xfrm>
+          <a:prstGeom prst="rect">
+            <a:avLst/>
+          </a:prstGeom>
+          <a:noFill/>
+          <a:ln/>
+        </p:spPr>
+        <p:txBody>
+          <a:bodyPr wrap="square" lIns="0" tIns="0" rIns="0" bIns="0" rtlCol="0" anchor="ctr"/>
+          <a:lstStyle/>
+          <a:p>
+            <a:pPr indent="0" marL="0">
+              <a:buNone/>
+            </a:pPr>
+            <a:r>
+              <a:rPr lang="en-US" sz="1050" dirty="0">
+                <a:solidFill>
+                  <a:srgbClr val="6E786B"/>
+                </a:solidFill>
+                <a:latin typeface="맑은 고딕" pitchFamily="34" charset="0"/>
+                <a:ea typeface="맑은 고딕" pitchFamily="34" charset="-122"/>
+                <a:cs typeface="맑은 고딕" pitchFamily="34" charset="-120"/>
+              </a:rPr>
+              <a:t>실측 변화폭이 기준의 2배 — 판정 여유 충분</a:t>
+            </a:r>
+            <a:endParaRPr lang="en-US" sz="1050" dirty="0"/>
           </a:p>
         </p:txBody>
       </p:sp>

--- a/thinqreal/fieldcheck/FieldCheck_진행보고_20260805.pptx
+++ b/thinqreal/fieldcheck/FieldCheck_진행보고_20260805.pptx
@@ -1226,7 +1226,7 @@
           <a:p>
             <a:r>
               <a:rPr lang="en-US" dirty="0"/>
-              <a:t>사진(실측 스냅샷)이 준비되면 왼쪽 목업을 실제 화면 캡처로 교체합니다.</a:t>
+              <a:t>두 스냅샷은 점검 장비가 자동 저장한 실제 사진이고, 점선 사각형이 판정에 쓰는 두 영역입니다.</a:t>
             </a:r>
             <a:endParaRPr lang="en-US" dirty="0"/>
           </a:p>
@@ -10367,99 +10367,74 @@
           </a:p>
         </p:txBody>
       </p:sp>
-      <p:sp>
-        <p:nvSpPr>
-          <p:cNvPr id="4" name="Shape 2"/>
-          <p:cNvSpPr/>
-          <p:nvPr/>
-        </p:nvSpPr>
-        <p:spPr>
-          <a:xfrm>
-            <a:off x="640080" y="1645920"/>
-            <a:ext cx="5577840" cy="3291840"/>
-          </a:xfrm>
-          <a:prstGeom prst="roundRect">
-            <a:avLst>
-              <a:gd name="adj" fmla="val 2500"/>
-            </a:avLst>
+      <p:pic>
+        <p:nvPicPr>
+          <p:cNvPr id="4" name="Image 0" descr="images/l3_off.jpg">    </p:cNvPr>
+          <p:cNvPicPr>
+            <a:picLocks noChangeAspect="1"/>
+          </p:cNvPicPr>
+          <p:nvPr/>
+        </p:nvPicPr>
+        <p:blipFill>
+          <a:blip r:embed="rId1"/>
+          <a:stretch>
+            <a:fillRect/>
+          </a:stretch>
+        </p:blipFill>
+        <p:spPr>
+          <a:xfrm>
+            <a:off x="640080" y="1691640"/>
+            <a:ext cx="2697480" cy="1517904"/>
+          </a:xfrm>
+          <a:prstGeom prst="rect">
+            <a:avLst/>
+          </a:prstGeom>
+        </p:spPr>
+      </p:pic>
+      <p:pic>
+        <p:nvPicPr>
+          <p:cNvPr id="5" name="Image 1" descr="images/l3_on.jpg">    </p:cNvPr>
+          <p:cNvPicPr>
+            <a:picLocks noChangeAspect="1"/>
+          </p:cNvPicPr>
+          <p:nvPr/>
+        </p:nvPicPr>
+        <p:blipFill>
+          <a:blip r:embed="rId2"/>
+          <a:stretch>
+            <a:fillRect/>
+          </a:stretch>
+        </p:blipFill>
+        <p:spPr>
+          <a:xfrm>
+            <a:off x="3520440" y="1691640"/>
+            <a:ext cx="2697480" cy="1517904"/>
+          </a:xfrm>
+          <a:prstGeom prst="rect">
+            <a:avLst/>
+          </a:prstGeom>
+        </p:spPr>
+      </p:pic>
+      <p:sp>
+        <p:nvSpPr>
+          <p:cNvPr id="6" name="Shape 2"/>
+          <p:cNvSpPr/>
+          <p:nvPr/>
+        </p:nvSpPr>
+        <p:spPr>
+          <a:xfrm>
+            <a:off x="1060704" y="2112264"/>
+            <a:ext cx="1892808" cy="210312"/>
+          </a:xfrm>
+          <a:prstGeom prst="rect">
+            <a:avLst/>
           </a:prstGeom>
           <a:solidFill>
-            <a:srgbClr val="2A3823"/>
-          </a:solidFill>
-          <a:ln w="19050">
-            <a:solidFill>
-              <a:srgbClr val="5C7355"/>
-            </a:solidFill>
-            <a:prstDash val="solid"/>
-          </a:ln>
-          <a:effectLst>
-            <a:outerShdw sx="100000" sy="100000" kx="0" ky="0" algn="bl" rotWithShape="0" blurRad="127000" dist="25400" dir="5400000">
-              <a:srgbClr val="000000">
-                <a:alpha val="10000"/>
-              </a:srgbClr>
-            </a:outerShdw>
-          </a:effectLst>
-        </p:spPr>
-      </p:sp>
-      <p:sp>
-        <p:nvSpPr>
-          <p:cNvPr id="5" name="Text 3"/>
-          <p:cNvSpPr/>
-          <p:nvPr/>
-        </p:nvSpPr>
-        <p:spPr>
-          <a:xfrm>
-            <a:off x="822960" y="1773936"/>
-            <a:ext cx="3200400" cy="274320"/>
-          </a:xfrm>
-          <a:prstGeom prst="rect">
-            <a:avLst/>
-          </a:prstGeom>
-          <a:noFill/>
-          <a:ln/>
-        </p:spPr>
-        <p:txBody>
-          <a:bodyPr wrap="square" lIns="0" tIns="0" rIns="0" bIns="0" rtlCol="0" anchor="ctr"/>
-          <a:lstStyle/>
-          <a:p>
-            <a:pPr indent="0" marL="0">
-              <a:buNone/>
-            </a:pPr>
-            <a:r>
-              <a:rPr lang="en-US" sz="1050" dirty="0">
-                <a:solidFill>
-                  <a:srgbClr val="97AC8E"/>
-                </a:solidFill>
-                <a:latin typeface="맑은 고딕" pitchFamily="34" charset="0"/>
-                <a:ea typeface="맑은 고딕" pitchFamily="34" charset="-122"/>
-                <a:cs typeface="맑은 고딕" pitchFamily="34" charset="-120"/>
-              </a:rPr>
-              <a:t>점검 장비 카메라 화면</a:t>
-            </a:r>
-            <a:endParaRPr lang="en-US" sz="1050" dirty="0"/>
-          </a:p>
-        </p:txBody>
-      </p:sp>
-      <p:sp>
-        <p:nvSpPr>
-          <p:cNvPr id="6" name="Shape 4"/>
-          <p:cNvSpPr/>
-          <p:nvPr/>
-        </p:nvSpPr>
-        <p:spPr>
-          <a:xfrm>
-            <a:off x="1234440" y="2240280"/>
-            <a:ext cx="2011680" cy="1051560"/>
-          </a:xfrm>
-          <a:prstGeom prst="rect">
-            <a:avLst/>
-          </a:prstGeom>
-          <a:solidFill>
-            <a:srgbClr val="A8803A">
-              <a:alpha val="45000"/>
+            <a:srgbClr val="FFFFFF">
+              <a:alpha val="0"/>
             </a:srgbClr>
           </a:solidFill>
-          <a:ln w="31750">
+          <a:ln w="25400">
             <a:solidFill>
               <a:srgbClr val="A8803A"/>
             </a:solidFill>
@@ -10469,102 +10444,24 @@
       </p:sp>
       <p:sp>
         <p:nvSpPr>
-          <p:cNvPr id="7" name="Text 5"/>
-          <p:cNvSpPr/>
-          <p:nvPr/>
-        </p:nvSpPr>
-        <p:spPr>
-          <a:xfrm>
-            <a:off x="1920240" y="2395728"/>
-            <a:ext cx="640080" cy="640080"/>
-          </a:xfrm>
-          <a:prstGeom prst="rect">
-            <a:avLst/>
-          </a:prstGeom>
-          <a:noFill/>
-          <a:ln/>
-        </p:spPr>
-        <p:txBody>
-          <a:bodyPr wrap="square" lIns="0" tIns="0" rIns="0" bIns="0" rtlCol="0" anchor="ctr"/>
-          <a:lstStyle/>
-          <a:p>
-            <a:pPr algn="ctr" indent="0" marL="0">
-              <a:buNone/>
-            </a:pPr>
-            <a:r>
-              <a:rPr lang="en-US" sz="2600" dirty="0">
-                <a:solidFill>
-                  <a:srgbClr val="F5E4C0"/>
-                </a:solidFill>
-                <a:latin typeface="맑은 고딕" pitchFamily="34" charset="0"/>
-                <a:ea typeface="맑은 고딕" pitchFamily="34" charset="-122"/>
-                <a:cs typeface="맑은 고딕" pitchFamily="34" charset="-120"/>
-              </a:rPr>
-              <a:t>☀</a:t>
-            </a:r>
-            <a:endParaRPr lang="en-US" sz="2600" dirty="0"/>
-          </a:p>
-        </p:txBody>
-      </p:sp>
-      <p:sp>
-        <p:nvSpPr>
-          <p:cNvPr id="8" name="Text 6"/>
-          <p:cNvSpPr/>
-          <p:nvPr/>
-        </p:nvSpPr>
-        <p:spPr>
-          <a:xfrm>
-            <a:off x="1234440" y="3346704"/>
-            <a:ext cx="2377440" cy="274320"/>
-          </a:xfrm>
-          <a:prstGeom prst="rect">
-            <a:avLst/>
-          </a:prstGeom>
-          <a:noFill/>
-          <a:ln/>
-        </p:spPr>
-        <p:txBody>
-          <a:bodyPr wrap="square" lIns="0" tIns="0" rIns="0" bIns="0" rtlCol="0" anchor="ctr"/>
-          <a:lstStyle/>
-          <a:p>
-            <a:pPr indent="0" marL="0">
-              <a:buNone/>
-            </a:pPr>
-            <a:r>
-              <a:rPr lang="en-US" sz="1100" b="1" dirty="0">
-                <a:solidFill>
-                  <a:srgbClr val="E8CF9E"/>
-                </a:solidFill>
-                <a:latin typeface="맑은 고딕" pitchFamily="34" charset="0"/>
-                <a:ea typeface="맑은 고딕" pitchFamily="34" charset="-122"/>
-                <a:cs typeface="맑은 고딕" pitchFamily="34" charset="-120"/>
-              </a:rPr>
-              <a:t>대상 영역 — 조명 기구</a:t>
-            </a:r>
-            <a:endParaRPr lang="en-US" sz="1100" dirty="0"/>
-          </a:p>
-        </p:txBody>
-      </p:sp>
-      <p:sp>
-        <p:nvSpPr>
-          <p:cNvPr id="9" name="Shape 7"/>
-          <p:cNvSpPr/>
-          <p:nvPr/>
-        </p:nvSpPr>
-        <p:spPr>
-          <a:xfrm>
-            <a:off x="4069080" y="2651760"/>
-            <a:ext cx="1645920" cy="1371600"/>
+          <p:cNvPr id="7" name="Shape 3"/>
+          <p:cNvSpPr/>
+          <p:nvPr/>
+        </p:nvSpPr>
+        <p:spPr>
+          <a:xfrm>
+            <a:off x="2999232" y="2322576"/>
+            <a:ext cx="292608" cy="548640"/>
           </a:xfrm>
           <a:prstGeom prst="rect">
             <a:avLst/>
           </a:prstGeom>
           <a:solidFill>
-            <a:srgbClr val="97AC8E">
-              <a:alpha val="38000"/>
+            <a:srgbClr val="FFFFFF">
+              <a:alpha val="0"/>
             </a:srgbClr>
           </a:solidFill>
-          <a:ln w="31750">
+          <a:ln w="25400">
             <a:solidFill>
               <a:srgbClr val="97AC8E"/>
             </a:solidFill>
@@ -10574,61 +10471,263 @@
       </p:sp>
       <p:sp>
         <p:nvSpPr>
-          <p:cNvPr id="10" name="Text 8"/>
-          <p:cNvSpPr/>
-          <p:nvPr/>
-        </p:nvSpPr>
-        <p:spPr>
-          <a:xfrm>
-            <a:off x="4023360" y="4059936"/>
-            <a:ext cx="2011680" cy="502920"/>
-          </a:xfrm>
-          <a:prstGeom prst="rect">
-            <a:avLst/>
-          </a:prstGeom>
-          <a:noFill/>
-          <a:ln/>
-        </p:spPr>
-        <p:txBody>
-          <a:bodyPr wrap="square" lIns="0" tIns="0" rIns="0" bIns="0" rtlCol="0" anchor="ctr"/>
-          <a:lstStyle/>
-          <a:p>
-            <a:pPr indent="0" marL="0">
-              <a:lnSpc>
-                <a:spcPts val="1400"/>
-              </a:lnSpc>
-              <a:buNone/>
-            </a:pPr>
-            <a:r>
-              <a:rPr lang="en-US" sz="1100" b="1" dirty="0">
-                <a:solidFill>
-                  <a:srgbClr val="C9D6C2"/>
-                </a:solidFill>
-                <a:latin typeface="맑은 고딕" pitchFamily="34" charset="0"/>
-                <a:ea typeface="맑은 고딕" pitchFamily="34" charset="-122"/>
-                <a:cs typeface="맑은 고딕" pitchFamily="34" charset="-120"/>
-              </a:rPr>
-              <a:t>참조 영역 — 변하지</a:t>
+          <p:cNvPr id="8" name="Shape 4"/>
+          <p:cNvSpPr/>
+          <p:nvPr/>
+        </p:nvSpPr>
+        <p:spPr>
+          <a:xfrm>
+            <a:off x="3941064" y="2112264"/>
+            <a:ext cx="1892808" cy="210312"/>
+          </a:xfrm>
+          <a:prstGeom prst="rect">
+            <a:avLst/>
+          </a:prstGeom>
+          <a:solidFill>
+            <a:srgbClr val="FFFFFF">
+              <a:alpha val="0"/>
+            </a:srgbClr>
+          </a:solidFill>
+          <a:ln w="25400">
+            <a:solidFill>
+              <a:srgbClr val="A8803A"/>
+            </a:solidFill>
+            <a:prstDash val="dash"/>
+          </a:ln>
+        </p:spPr>
+      </p:sp>
+      <p:sp>
+        <p:nvSpPr>
+          <p:cNvPr id="9" name="Shape 5"/>
+          <p:cNvSpPr/>
+          <p:nvPr/>
+        </p:nvSpPr>
+        <p:spPr>
+          <a:xfrm>
+            <a:off x="5879592" y="2322576"/>
+            <a:ext cx="292608" cy="548640"/>
+          </a:xfrm>
+          <a:prstGeom prst="rect">
+            <a:avLst/>
+          </a:prstGeom>
+          <a:solidFill>
+            <a:srgbClr val="FFFFFF">
+              <a:alpha val="0"/>
+            </a:srgbClr>
+          </a:solidFill>
+          <a:ln w="25400">
+            <a:solidFill>
+              <a:srgbClr val="97AC8E"/>
+            </a:solidFill>
+            <a:prstDash val="dash"/>
+          </a:ln>
+        </p:spPr>
+      </p:sp>
+      <p:sp>
+        <p:nvSpPr>
+          <p:cNvPr id="10" name="Text 6"/>
+          <p:cNvSpPr/>
+          <p:nvPr/>
+        </p:nvSpPr>
+        <p:spPr>
+          <a:xfrm>
+            <a:off x="640080" y="3246120"/>
+            <a:ext cx="2697480" cy="274320"/>
+          </a:xfrm>
+          <a:prstGeom prst="rect">
+            <a:avLst/>
+          </a:prstGeom>
+          <a:noFill/>
+          <a:ln/>
+        </p:spPr>
+        <p:txBody>
+          <a:bodyPr wrap="square" lIns="0" tIns="0" rIns="0" bIns="0" rtlCol="0" anchor="ctr"/>
+          <a:lstStyle/>
+          <a:p>
+            <a:pPr algn="ctr" indent="0" marL="0">
+              <a:buNone/>
+            </a:pPr>
+            <a:r>
+              <a:rPr lang="en-US" sz="1150" b="1" dirty="0">
+                <a:solidFill>
+                  <a:srgbClr val="1F2420"/>
+                </a:solidFill>
+                <a:latin typeface="맑은 고딕" pitchFamily="34" charset="0"/>
+                <a:ea typeface="맑은 고딕" pitchFamily="34" charset="-122"/>
+                <a:cs typeface="맑은 고딕" pitchFamily="34" charset="-120"/>
+              </a:rPr>
+              <a:t>실측 스냅샷 — 조명 꺼짐</a:t>
+            </a:r>
+            <a:endParaRPr lang="en-US" sz="1150" dirty="0"/>
+          </a:p>
+        </p:txBody>
+      </p:sp>
+      <p:sp>
+        <p:nvSpPr>
+          <p:cNvPr id="11" name="Text 7"/>
+          <p:cNvSpPr/>
+          <p:nvPr/>
+        </p:nvSpPr>
+        <p:spPr>
+          <a:xfrm>
+            <a:off x="3520440" y="3246120"/>
+            <a:ext cx="2697480" cy="274320"/>
+          </a:xfrm>
+          <a:prstGeom prst="rect">
+            <a:avLst/>
+          </a:prstGeom>
+          <a:noFill/>
+          <a:ln/>
+        </p:spPr>
+        <p:txBody>
+          <a:bodyPr wrap="square" lIns="0" tIns="0" rIns="0" bIns="0" rtlCol="0" anchor="ctr"/>
+          <a:lstStyle/>
+          <a:p>
+            <a:pPr algn="ctr" indent="0" marL="0">
+              <a:buNone/>
+            </a:pPr>
+            <a:r>
+              <a:rPr lang="en-US" sz="1150" b="1" dirty="0">
+                <a:solidFill>
+                  <a:srgbClr val="1F2420"/>
+                </a:solidFill>
+                <a:latin typeface="맑은 고딕" pitchFamily="34" charset="0"/>
+                <a:ea typeface="맑은 고딕" pitchFamily="34" charset="-122"/>
+                <a:cs typeface="맑은 고딕" pitchFamily="34" charset="-120"/>
+              </a:rPr>
+              <a:t>실측 스냅샷 — 조명 켜짐</a:t>
+            </a:r>
+            <a:endParaRPr lang="en-US" sz="1150" dirty="0"/>
+          </a:p>
+        </p:txBody>
+      </p:sp>
+      <p:sp>
+        <p:nvSpPr>
+          <p:cNvPr id="12" name="Shape 8"/>
+          <p:cNvSpPr/>
+          <p:nvPr/>
+        </p:nvSpPr>
+        <p:spPr>
+          <a:xfrm>
+            <a:off x="822960" y="3639312"/>
+            <a:ext cx="310896" cy="182880"/>
+          </a:xfrm>
+          <a:prstGeom prst="rect">
+            <a:avLst/>
+          </a:prstGeom>
+          <a:solidFill>
+            <a:srgbClr val="FFFFFF">
+              <a:alpha val="0"/>
+            </a:srgbClr>
+          </a:solidFill>
+          <a:ln w="25400">
+            <a:solidFill>
+              <a:srgbClr val="A8803A"/>
+            </a:solidFill>
+            <a:prstDash val="dash"/>
+          </a:ln>
+        </p:spPr>
+      </p:sp>
+      <p:sp>
+        <p:nvSpPr>
+          <p:cNvPr id="13" name="Text 9"/>
+          <p:cNvSpPr/>
+          <p:nvPr/>
+        </p:nvSpPr>
+        <p:spPr>
+          <a:xfrm>
+            <a:off x="1207008" y="3593592"/>
+            <a:ext cx="1920240" cy="274320"/>
+          </a:xfrm>
+          <a:prstGeom prst="rect">
+            <a:avLst/>
+          </a:prstGeom>
+          <a:noFill/>
+          <a:ln/>
+        </p:spPr>
+        <p:txBody>
+          <a:bodyPr wrap="square" lIns="0" tIns="0" rIns="0" bIns="0" rtlCol="0" anchor="ctr"/>
+          <a:lstStyle/>
+          <a:p>
+            <a:pPr indent="0" marL="0">
+              <a:buNone/>
+            </a:pPr>
+            <a:r>
+              <a:rPr lang="en-US" sz="1100" dirty="0">
+                <a:solidFill>
+                  <a:srgbClr val="1F2420"/>
+                </a:solidFill>
+                <a:latin typeface="맑은 고딕" pitchFamily="34" charset="0"/>
+                <a:ea typeface="맑은 고딕" pitchFamily="34" charset="-122"/>
+                <a:cs typeface="맑은 고딕" pitchFamily="34" charset="-120"/>
+              </a:rPr>
+              <a:t>대상 영역 — 조명</a:t>
             </a:r>
             <a:endParaRPr lang="en-US" sz="1100" dirty="0"/>
           </a:p>
-          <a:p>
-            <a:pPr indent="0" marL="0">
-              <a:lnSpc>
-                <a:spcPts val="1400"/>
-              </a:lnSpc>
-              <a:buNone/>
-            </a:pPr>
-            <a:r>
-              <a:rPr lang="en-US" sz="1100" b="1" dirty="0">
-                <a:solidFill>
-                  <a:srgbClr val="C9D6C2"/>
-                </a:solidFill>
-                <a:latin typeface="맑은 고딕" pitchFamily="34" charset="0"/>
-                <a:ea typeface="맑은 고딕" pitchFamily="34" charset="-122"/>
-                <a:cs typeface="맑은 고딕" pitchFamily="34" charset="-120"/>
-              </a:rPr>
-              <a:t>않는 벽 한 조각</a:t>
+        </p:txBody>
+      </p:sp>
+      <p:sp>
+        <p:nvSpPr>
+          <p:cNvPr id="14" name="Shape 10"/>
+          <p:cNvSpPr/>
+          <p:nvPr/>
+        </p:nvSpPr>
+        <p:spPr>
+          <a:xfrm>
+            <a:off x="3291840" y="3639312"/>
+            <a:ext cx="310896" cy="182880"/>
+          </a:xfrm>
+          <a:prstGeom prst="rect">
+            <a:avLst/>
+          </a:prstGeom>
+          <a:solidFill>
+            <a:srgbClr val="FFFFFF">
+              <a:alpha val="0"/>
+            </a:srgbClr>
+          </a:solidFill>
+          <a:ln w="25400">
+            <a:solidFill>
+              <a:srgbClr val="97AC8E"/>
+            </a:solidFill>
+            <a:prstDash val="dash"/>
+          </a:ln>
+        </p:spPr>
+      </p:sp>
+      <p:sp>
+        <p:nvSpPr>
+          <p:cNvPr id="15" name="Text 11"/>
+          <p:cNvSpPr/>
+          <p:nvPr/>
+        </p:nvSpPr>
+        <p:spPr>
+          <a:xfrm>
+            <a:off x="3675888" y="3593592"/>
+            <a:ext cx="2560320" cy="274320"/>
+          </a:xfrm>
+          <a:prstGeom prst="rect">
+            <a:avLst/>
+          </a:prstGeom>
+          <a:noFill/>
+          <a:ln/>
+        </p:spPr>
+        <p:txBody>
+          <a:bodyPr wrap="square" lIns="0" tIns="0" rIns="0" bIns="0" rtlCol="0" anchor="ctr"/>
+          <a:lstStyle/>
+          <a:p>
+            <a:pPr indent="0" marL="0">
+              <a:buNone/>
+            </a:pPr>
+            <a:r>
+              <a:rPr lang="en-US" sz="1100" dirty="0">
+                <a:solidFill>
+                  <a:srgbClr val="1F2420"/>
+                </a:solidFill>
+                <a:latin typeface="맑은 고딕" pitchFamily="34" charset="0"/>
+                <a:ea typeface="맑은 고딕" pitchFamily="34" charset="-122"/>
+                <a:cs typeface="맑은 고딕" pitchFamily="34" charset="-120"/>
+              </a:rPr>
+              <a:t>참조 영역 — 변하지 않는 벽</a:t>
             </a:r>
             <a:endParaRPr lang="en-US" sz="1100" dirty="0"/>
           </a:p>
@@ -10636,13 +10735,13 @@
       </p:sp>
       <p:sp>
         <p:nvSpPr>
-          <p:cNvPr id="11" name="Shape 9"/>
-          <p:cNvSpPr/>
-          <p:nvPr/>
-        </p:nvSpPr>
-        <p:spPr>
-          <a:xfrm>
-            <a:off x="640080" y="5138928"/>
+          <p:cNvPr id="16" name="Shape 12"/>
+          <p:cNvSpPr/>
+          <p:nvPr/>
+        </p:nvSpPr>
+        <p:spPr>
+          <a:xfrm>
+            <a:off x="640080" y="4041648"/>
             <a:ext cx="5577840" cy="914400"/>
           </a:xfrm>
           <a:prstGeom prst="roundRect">
@@ -10670,13 +10769,13 @@
       </p:sp>
       <p:sp>
         <p:nvSpPr>
-          <p:cNvPr id="12" name="Text 10"/>
-          <p:cNvSpPr/>
-          <p:nvPr/>
-        </p:nvSpPr>
-        <p:spPr>
-          <a:xfrm>
-            <a:off x="914400" y="5138928"/>
+          <p:cNvPr id="17" name="Text 13"/>
+          <p:cNvSpPr/>
+          <p:nvPr/>
+        </p:nvSpPr>
+        <p:spPr>
+          <a:xfrm>
+            <a:off x="914400" y="4041648"/>
             <a:ext cx="5120640" cy="502920"/>
           </a:xfrm>
           <a:prstGeom prst="rect">
@@ -10723,13 +10822,13 @@
       </p:sp>
       <p:sp>
         <p:nvSpPr>
-          <p:cNvPr id="13" name="Text 11"/>
-          <p:cNvSpPr/>
-          <p:nvPr/>
-        </p:nvSpPr>
-        <p:spPr>
-          <a:xfrm>
-            <a:off x="914400" y="5650992"/>
+          <p:cNvPr id="18" name="Text 14"/>
+          <p:cNvSpPr/>
+          <p:nvPr/>
+        </p:nvSpPr>
+        <p:spPr>
+          <a:xfrm>
+            <a:off x="914400" y="4553712"/>
             <a:ext cx="5120640" cy="274320"/>
           </a:xfrm>
           <a:prstGeom prst="rect">
@@ -10746,7 +10845,7 @@
               <a:buNone/>
             </a:pPr>
             <a:r>
-              <a:rPr lang="en-US" sz="1000" dirty="0">
+              <a:rPr lang="en-US" sz="1050" dirty="0">
                 <a:solidFill>
                   <a:srgbClr val="6E786B"/>
                 </a:solidFill>
@@ -10754,15 +10853,57 @@
                 <a:ea typeface="맑은 고딕" pitchFamily="34" charset="-122"/>
                 <a:cs typeface="맑은 고딕" pitchFamily="34" charset="-120"/>
               </a:rPr>
-              <a:t>실제 판정 스냅샷은 점검 장비에 자동 축적됩니다 (recordings/camera/)</a:t>
-            </a:r>
-            <a:endParaRPr lang="en-US" sz="1000" dirty="0"/>
-          </a:p>
-        </p:txBody>
-      </p:sp>
-      <p:sp>
-        <p:nvSpPr>
-          <p:cNvPr id="14" name="Shape 12"/>
+              <a:t>두 영역의 평균 밝기(픽셀값 0~255)를 매초 계산합니다</a:t>
+            </a:r>
+            <a:endParaRPr lang="en-US" sz="1050" dirty="0"/>
+          </a:p>
+        </p:txBody>
+      </p:sp>
+      <p:sp>
+        <p:nvSpPr>
+          <p:cNvPr id="19" name="Text 15"/>
+          <p:cNvSpPr/>
+          <p:nvPr/>
+        </p:nvSpPr>
+        <p:spPr>
+          <a:xfrm>
+            <a:off x="640080" y="5138928"/>
+            <a:ext cx="5577840" cy="548640"/>
+          </a:xfrm>
+          <a:prstGeom prst="rect">
+            <a:avLst/>
+          </a:prstGeom>
+          <a:noFill/>
+          <a:ln/>
+        </p:spPr>
+        <p:txBody>
+          <a:bodyPr wrap="square" lIns="0" tIns="0" rIns="0" bIns="0" rtlCol="0" anchor="ctr"/>
+          <a:lstStyle/>
+          <a:p>
+            <a:pPr indent="0" marL="0">
+              <a:lnSpc>
+                <a:spcPts val="1500"/>
+              </a:lnSpc>
+              <a:buNone/>
+            </a:pPr>
+            <a:r>
+              <a:rPr lang="en-US" sz="1050" dirty="0">
+                <a:solidFill>
+                  <a:srgbClr val="6E786B"/>
+                </a:solidFill>
+                <a:latin typeface="맑은 고딕" pitchFamily="34" charset="0"/>
+                <a:ea typeface="맑은 고딕" pitchFamily="34" charset="-122"/>
+                <a:cs typeface="맑은 고딕" pitchFamily="34" charset="-120"/>
+              </a:rPr>
+              <a:t>위 사진은 연출이 아니라 점검 장비가 판정 시점에 자동 저장한 실제 스냅샷입니다 (recordings/camera/)</a:t>
+            </a:r>
+            <a:endParaRPr lang="en-US" sz="1050" dirty="0"/>
+          </a:p>
+        </p:txBody>
+      </p:sp>
+      <p:sp>
+        <p:nvSpPr>
+          <p:cNvPr id="20" name="Shape 16"/>
           <p:cNvSpPr/>
           <p:nvPr/>
         </p:nvSpPr>
@@ -10789,7 +10930,7 @@
       </p:sp>
       <p:sp>
         <p:nvSpPr>
-          <p:cNvPr id="15" name="Text 13"/>
+          <p:cNvPr id="21" name="Text 17"/>
           <p:cNvSpPr/>
           <p:nvPr/>
         </p:nvSpPr>
@@ -10828,7 +10969,7 @@
       </p:sp>
       <p:sp>
         <p:nvSpPr>
-          <p:cNvPr id="16" name="Text 14"/>
+          <p:cNvPr id="22" name="Text 18"/>
           <p:cNvSpPr/>
           <p:nvPr/>
         </p:nvSpPr>
@@ -10930,7 +11071,7 @@
       </p:sp>
       <p:sp>
         <p:nvSpPr>
-          <p:cNvPr id="17" name="Shape 15"/>
+          <p:cNvPr id="23" name="Shape 19"/>
           <p:cNvSpPr/>
           <p:nvPr/>
         </p:nvSpPr>
@@ -10957,7 +11098,7 @@
       </p:sp>
       <p:sp>
         <p:nvSpPr>
-          <p:cNvPr id="18" name="Text 16"/>
+          <p:cNvPr id="24" name="Text 20"/>
           <p:cNvSpPr/>
           <p:nvPr/>
         </p:nvSpPr>
@@ -10996,7 +11137,7 @@
       </p:sp>
       <p:sp>
         <p:nvSpPr>
-          <p:cNvPr id="19" name="Text 17"/>
+          <p:cNvPr id="25" name="Text 21"/>
           <p:cNvSpPr/>
           <p:nvPr/>
         </p:nvSpPr>
@@ -11049,7 +11190,7 @@
       </p:sp>
       <p:sp>
         <p:nvSpPr>
-          <p:cNvPr id="20" name="Text 18"/>
+          <p:cNvPr id="26" name="Text 22"/>
           <p:cNvSpPr/>
           <p:nvPr/>
         </p:nvSpPr>
@@ -11130,7 +11271,7 @@
       </p:sp>
       <p:sp>
         <p:nvSpPr>
-          <p:cNvPr id="21" name="Shape 19"/>
+          <p:cNvPr id="27" name="Shape 23"/>
           <p:cNvSpPr/>
           <p:nvPr/>
         </p:nvSpPr>
@@ -11153,7 +11294,7 @@
       </p:sp>
       <p:sp>
         <p:nvSpPr>
-          <p:cNvPr id="22" name="Text 20"/>
+          <p:cNvPr id="28" name="Text 24"/>
           <p:cNvSpPr/>
           <p:nvPr/>
         </p:nvSpPr>
@@ -11234,7 +11375,7 @@
       </p:sp>
       <p:sp>
         <p:nvSpPr>
-          <p:cNvPr id="23" name="Text 21"/>
+          <p:cNvPr id="29" name="Text 25"/>
           <p:cNvSpPr/>
           <p:nvPr/>
         </p:nvSpPr>

--- a/thinqreal/fieldcheck/FieldCheck_진행보고_20260805.pptx
+++ b/thinqreal/fieldcheck/FieldCheck_진행보고_20260805.pptx
@@ -10423,8 +10423,8 @@
         </p:nvSpPr>
         <p:spPr>
           <a:xfrm>
-            <a:off x="1060704" y="2112264"/>
-            <a:ext cx="1892808" cy="210312"/>
+            <a:off x="868680" y="1892808"/>
+            <a:ext cx="2240280" cy="384048"/>
           </a:xfrm>
           <a:prstGeom prst="rect">
             <a:avLst/>
@@ -10450,8 +10450,8 @@
         </p:nvSpPr>
         <p:spPr>
           <a:xfrm>
-            <a:off x="2999232" y="2322576"/>
-            <a:ext cx="292608" cy="548640"/>
+            <a:off x="740664" y="1993392"/>
+            <a:ext cx="219456" cy="1143000"/>
           </a:xfrm>
           <a:prstGeom prst="rect">
             <a:avLst/>
@@ -10477,8 +10477,8 @@
         </p:nvSpPr>
         <p:spPr>
           <a:xfrm>
-            <a:off x="3941064" y="2112264"/>
-            <a:ext cx="1892808" cy="210312"/>
+            <a:off x="3749040" y="1892808"/>
+            <a:ext cx="2240280" cy="384048"/>
           </a:xfrm>
           <a:prstGeom prst="rect">
             <a:avLst/>
@@ -10504,8 +10504,8 @@
         </p:nvSpPr>
         <p:spPr>
           <a:xfrm>
-            <a:off x="5879592" y="2322576"/>
-            <a:ext cx="292608" cy="548640"/>
+            <a:off x="3621024" y="1993392"/>
+            <a:ext cx="219456" cy="1143000"/>
           </a:xfrm>
           <a:prstGeom prst="rect">
             <a:avLst/>
